--- a/docs/pptx/whole/ritu-linsubhr-sens-anemia3_10pct.pptx
+++ b/docs/pptx/whole/ritu-linsubhr-sens-anemia3_10pct.pptx
@@ -3390,581 +3390,581 @@
           <p:spPr>
             <a:xfrm>
               <a:off x="1172049" y="2073503"/>
-              <a:ext cx="7090630" cy="3398150"/>
+              <a:ext cx="7090630" cy="3397321"/>
             </a:xfrm>
             <a:custGeom>
               <a:avLst/>
               <a:pathLst>
-                <a:path w="7090630" h="3398150">
+                <a:path w="7090630" h="3397321">
                   <a:moveTo>
-                    <a:pt x="728477" y="0"/>
+                    <a:pt x="717793" y="0"/>
                   </a:moveTo>
                   <a:lnTo>
-                    <a:pt x="787847" y="118836"/>
-                  </a:lnTo>
-                  <a:lnTo>
-                    <a:pt x="859470" y="256338"/>
-                  </a:lnTo>
-                  <a:lnTo>
-                    <a:pt x="931092" y="388221"/>
-                  </a:lnTo>
-                  <a:lnTo>
-                    <a:pt x="1002715" y="514714"/>
-                  </a:lnTo>
-                  <a:lnTo>
-                    <a:pt x="1074337" y="636039"/>
-                  </a:lnTo>
-                  <a:lnTo>
-                    <a:pt x="1145960" y="752406"/>
-                  </a:lnTo>
-                  <a:lnTo>
-                    <a:pt x="1217582" y="864018"/>
-                  </a:lnTo>
-                  <a:lnTo>
-                    <a:pt x="1289205" y="971069"/>
-                  </a:lnTo>
-                  <a:lnTo>
-                    <a:pt x="1360827" y="1073745"/>
-                  </a:lnTo>
-                  <a:lnTo>
-                    <a:pt x="1432450" y="1172226"/>
-                  </a:lnTo>
-                  <a:lnTo>
-                    <a:pt x="1504073" y="1266683"/>
-                  </a:lnTo>
-                  <a:lnTo>
-                    <a:pt x="1575695" y="1357280"/>
-                  </a:lnTo>
-                  <a:lnTo>
-                    <a:pt x="1647318" y="1444174"/>
-                  </a:lnTo>
-                  <a:lnTo>
-                    <a:pt x="1718940" y="1527518"/>
-                  </a:lnTo>
-                  <a:lnTo>
-                    <a:pt x="1790563" y="1607456"/>
-                  </a:lnTo>
-                  <a:lnTo>
-                    <a:pt x="1862185" y="1684128"/>
-                  </a:lnTo>
-                  <a:lnTo>
-                    <a:pt x="1933808" y="1757666"/>
-                  </a:lnTo>
-                  <a:lnTo>
-                    <a:pt x="2005430" y="1828200"/>
-                  </a:lnTo>
-                  <a:lnTo>
-                    <a:pt x="2077053" y="1895851"/>
-                  </a:lnTo>
-                  <a:lnTo>
-                    <a:pt x="2148675" y="1960738"/>
-                  </a:lnTo>
-                  <a:lnTo>
-                    <a:pt x="2220298" y="2022973"/>
-                  </a:lnTo>
-                  <a:lnTo>
-                    <a:pt x="2291920" y="2082665"/>
-                  </a:lnTo>
-                  <a:lnTo>
-                    <a:pt x="2363543" y="2139918"/>
-                  </a:lnTo>
-                  <a:lnTo>
-                    <a:pt x="2435165" y="2194832"/>
-                  </a:lnTo>
-                  <a:lnTo>
-                    <a:pt x="2506788" y="2247501"/>
-                  </a:lnTo>
-                  <a:lnTo>
-                    <a:pt x="2578410" y="2298018"/>
-                  </a:lnTo>
-                  <a:lnTo>
-                    <a:pt x="2650033" y="2346471"/>
-                  </a:lnTo>
-                  <a:lnTo>
-                    <a:pt x="2721655" y="2392944"/>
-                  </a:lnTo>
-                  <a:lnTo>
-                    <a:pt x="2793278" y="2437518"/>
-                  </a:lnTo>
-                  <a:lnTo>
-                    <a:pt x="2864901" y="2480270"/>
-                  </a:lnTo>
-                  <a:lnTo>
-                    <a:pt x="2936523" y="2521276"/>
-                  </a:lnTo>
-                  <a:lnTo>
-                    <a:pt x="3008146" y="2560606"/>
-                  </a:lnTo>
-                  <a:lnTo>
-                    <a:pt x="3079768" y="2598328"/>
-                  </a:lnTo>
-                  <a:lnTo>
-                    <a:pt x="3151391" y="2634510"/>
-                  </a:lnTo>
-                  <a:lnTo>
-                    <a:pt x="3223013" y="2655826"/>
-                  </a:lnTo>
-                  <a:lnTo>
-                    <a:pt x="3294636" y="2659360"/>
-                  </a:lnTo>
-                  <a:lnTo>
-                    <a:pt x="3366258" y="2662879"/>
-                  </a:lnTo>
-                  <a:lnTo>
-                    <a:pt x="3437881" y="2666383"/>
-                  </a:lnTo>
-                  <a:lnTo>
-                    <a:pt x="3509503" y="2669871"/>
-                  </a:lnTo>
-                  <a:lnTo>
-                    <a:pt x="3581126" y="2673345"/>
-                  </a:lnTo>
-                  <a:lnTo>
-                    <a:pt x="3652748" y="2676804"/>
-                  </a:lnTo>
-                  <a:lnTo>
-                    <a:pt x="3724371" y="2680249"/>
-                  </a:lnTo>
-                  <a:lnTo>
-                    <a:pt x="3795993" y="2683678"/>
-                  </a:lnTo>
-                  <a:lnTo>
-                    <a:pt x="3867616" y="2687093"/>
-                  </a:lnTo>
-                  <a:lnTo>
-                    <a:pt x="3939238" y="2690494"/>
-                  </a:lnTo>
-                  <a:lnTo>
-                    <a:pt x="4010861" y="2693880"/>
-                  </a:lnTo>
-                  <a:lnTo>
-                    <a:pt x="4082483" y="2697251"/>
-                  </a:lnTo>
-                  <a:lnTo>
-                    <a:pt x="4154106" y="2700608"/>
-                  </a:lnTo>
-                  <a:lnTo>
-                    <a:pt x="4225729" y="2703951"/>
-                  </a:lnTo>
-                  <a:lnTo>
-                    <a:pt x="4297351" y="2707280"/>
-                  </a:lnTo>
-                  <a:lnTo>
-                    <a:pt x="4368974" y="2710594"/>
-                  </a:lnTo>
-                  <a:lnTo>
-                    <a:pt x="4440596" y="2713894"/>
-                  </a:lnTo>
-                  <a:lnTo>
-                    <a:pt x="4512219" y="2717180"/>
-                  </a:lnTo>
-                  <a:lnTo>
-                    <a:pt x="4583841" y="2720452"/>
-                  </a:lnTo>
-                  <a:lnTo>
-                    <a:pt x="4655464" y="2723710"/>
-                  </a:lnTo>
-                  <a:lnTo>
-                    <a:pt x="4727086" y="2726954"/>
-                  </a:lnTo>
-                  <a:lnTo>
-                    <a:pt x="4798709" y="2730184"/>
-                  </a:lnTo>
-                  <a:lnTo>
-                    <a:pt x="4870331" y="2733401"/>
-                  </a:lnTo>
-                  <a:lnTo>
-                    <a:pt x="4941954" y="2736604"/>
-                  </a:lnTo>
-                  <a:lnTo>
-                    <a:pt x="5013576" y="2739793"/>
-                  </a:lnTo>
-                  <a:lnTo>
-                    <a:pt x="5085199" y="2742968"/>
-                  </a:lnTo>
-                  <a:lnTo>
-                    <a:pt x="5156821" y="2746130"/>
-                  </a:lnTo>
-                  <a:lnTo>
-                    <a:pt x="5228444" y="2749279"/>
-                  </a:lnTo>
-                  <a:lnTo>
-                    <a:pt x="5300066" y="2752414"/>
-                  </a:lnTo>
-                  <a:lnTo>
-                    <a:pt x="5371689" y="2755535"/>
-                  </a:lnTo>
-                  <a:lnTo>
-                    <a:pt x="5443311" y="2758644"/>
-                  </a:lnTo>
-                  <a:lnTo>
-                    <a:pt x="5514934" y="2761739"/>
-                  </a:lnTo>
-                  <a:lnTo>
-                    <a:pt x="5586557" y="2764820"/>
-                  </a:lnTo>
-                  <a:lnTo>
-                    <a:pt x="5658179" y="2767889"/>
-                  </a:lnTo>
-                  <a:lnTo>
-                    <a:pt x="5729802" y="2770945"/>
-                  </a:lnTo>
-                  <a:lnTo>
-                    <a:pt x="5801424" y="2773987"/>
-                  </a:lnTo>
-                  <a:lnTo>
-                    <a:pt x="5873047" y="2777017"/>
-                  </a:lnTo>
-                  <a:lnTo>
-                    <a:pt x="5944669" y="2780033"/>
-                  </a:lnTo>
-                  <a:lnTo>
-                    <a:pt x="6016292" y="2783037"/>
-                  </a:lnTo>
-                  <a:lnTo>
-                    <a:pt x="6087914" y="2786028"/>
-                  </a:lnTo>
-                  <a:lnTo>
-                    <a:pt x="6159537" y="2789006"/>
-                  </a:lnTo>
-                  <a:lnTo>
-                    <a:pt x="6231159" y="2791971"/>
-                  </a:lnTo>
-                  <a:lnTo>
-                    <a:pt x="6302782" y="2794924"/>
-                  </a:lnTo>
-                  <a:lnTo>
-                    <a:pt x="6374404" y="2797864"/>
-                  </a:lnTo>
-                  <a:lnTo>
-                    <a:pt x="6446027" y="2800792"/>
-                  </a:lnTo>
-                  <a:lnTo>
-                    <a:pt x="6517649" y="2803707"/>
-                  </a:lnTo>
-                  <a:lnTo>
-                    <a:pt x="6589272" y="2806610"/>
-                  </a:lnTo>
-                  <a:lnTo>
-                    <a:pt x="6660894" y="2809500"/>
-                  </a:lnTo>
-                  <a:lnTo>
-                    <a:pt x="6732517" y="2812378"/>
-                  </a:lnTo>
-                  <a:lnTo>
-                    <a:pt x="6804139" y="2815244"/>
-                  </a:lnTo>
-                  <a:lnTo>
-                    <a:pt x="6875762" y="2818097"/>
-                  </a:lnTo>
-                  <a:lnTo>
-                    <a:pt x="6947385" y="2820938"/>
-                  </a:lnTo>
-                  <a:lnTo>
-                    <a:pt x="7019007" y="2823768"/>
-                  </a:lnTo>
-                  <a:lnTo>
-                    <a:pt x="7090630" y="2826585"/>
-                  </a:lnTo>
-                  <a:lnTo>
-                    <a:pt x="7090630" y="3398150"/>
-                  </a:lnTo>
-                  <a:lnTo>
-                    <a:pt x="7019007" y="3394503"/>
-                  </a:lnTo>
-                  <a:lnTo>
-                    <a:pt x="6947385" y="3390701"/>
-                  </a:lnTo>
-                  <a:lnTo>
-                    <a:pt x="6875762" y="3386737"/>
-                  </a:lnTo>
-                  <a:lnTo>
-                    <a:pt x="6804139" y="3382604"/>
-                  </a:lnTo>
-                  <a:lnTo>
-                    <a:pt x="6732517" y="3378295"/>
-                  </a:lnTo>
-                  <a:lnTo>
-                    <a:pt x="6660894" y="3373802"/>
-                  </a:lnTo>
-                  <a:lnTo>
-                    <a:pt x="6589272" y="3369118"/>
-                  </a:lnTo>
-                  <a:lnTo>
-                    <a:pt x="6517649" y="3364235"/>
-                  </a:lnTo>
-                  <a:lnTo>
-                    <a:pt x="6446027" y="3359143"/>
-                  </a:lnTo>
-                  <a:lnTo>
-                    <a:pt x="6374404" y="3353834"/>
-                  </a:lnTo>
-                  <a:lnTo>
-                    <a:pt x="6302782" y="3348299"/>
-                  </a:lnTo>
-                  <a:lnTo>
-                    <a:pt x="6231159" y="3342529"/>
-                  </a:lnTo>
-                  <a:lnTo>
-                    <a:pt x="6159537" y="3336512"/>
-                  </a:lnTo>
-                  <a:lnTo>
-                    <a:pt x="6087914" y="3330240"/>
-                  </a:lnTo>
-                  <a:lnTo>
-                    <a:pt x="6016292" y="3323699"/>
-                  </a:lnTo>
-                  <a:lnTo>
-                    <a:pt x="5944669" y="3316881"/>
-                  </a:lnTo>
-                  <a:lnTo>
-                    <a:pt x="5873047" y="3309772"/>
-                  </a:lnTo>
-                  <a:lnTo>
-                    <a:pt x="5801424" y="3302359"/>
-                  </a:lnTo>
-                  <a:lnTo>
-                    <a:pt x="5729802" y="3294632"/>
-                  </a:lnTo>
-                  <a:lnTo>
-                    <a:pt x="5658179" y="3286575"/>
-                  </a:lnTo>
-                  <a:lnTo>
-                    <a:pt x="5586557" y="3278174"/>
-                  </a:lnTo>
-                  <a:lnTo>
-                    <a:pt x="5514934" y="3269416"/>
-                  </a:lnTo>
-                  <a:lnTo>
-                    <a:pt x="5443311" y="3260284"/>
-                  </a:lnTo>
-                  <a:lnTo>
-                    <a:pt x="5371689" y="3250764"/>
-                  </a:lnTo>
-                  <a:lnTo>
-                    <a:pt x="5300066" y="3240838"/>
-                  </a:lnTo>
-                  <a:lnTo>
-                    <a:pt x="5228444" y="3230489"/>
-                  </a:lnTo>
-                  <a:lnTo>
-                    <a:pt x="5156821" y="3219699"/>
-                  </a:lnTo>
-                  <a:lnTo>
-                    <a:pt x="5085199" y="3208450"/>
-                  </a:lnTo>
-                  <a:lnTo>
-                    <a:pt x="5013576" y="3196721"/>
-                  </a:lnTo>
-                  <a:lnTo>
-                    <a:pt x="4941954" y="3184492"/>
-                  </a:lnTo>
-                  <a:lnTo>
-                    <a:pt x="4870331" y="3171743"/>
-                  </a:lnTo>
-                  <a:lnTo>
-                    <a:pt x="4798709" y="3158450"/>
-                  </a:lnTo>
-                  <a:lnTo>
-                    <a:pt x="4727086" y="3144591"/>
-                  </a:lnTo>
-                  <a:lnTo>
-                    <a:pt x="4655464" y="3130141"/>
-                  </a:lnTo>
-                  <a:lnTo>
-                    <a:pt x="4583841" y="3115076"/>
-                  </a:lnTo>
-                  <a:lnTo>
-                    <a:pt x="4512219" y="3099369"/>
-                  </a:lnTo>
-                  <a:lnTo>
-                    <a:pt x="4440596" y="3082993"/>
-                  </a:lnTo>
-                  <a:lnTo>
-                    <a:pt x="4368974" y="3065919"/>
-                  </a:lnTo>
-                  <a:lnTo>
-                    <a:pt x="4297351" y="3048118"/>
-                  </a:lnTo>
-                  <a:lnTo>
-                    <a:pt x="4225729" y="3029558"/>
-                  </a:lnTo>
-                  <a:lnTo>
-                    <a:pt x="4154106" y="3010208"/>
-                  </a:lnTo>
-                  <a:lnTo>
-                    <a:pt x="4082483" y="2990033"/>
-                  </a:lnTo>
-                  <a:lnTo>
-                    <a:pt x="4010861" y="2968999"/>
-                  </a:lnTo>
-                  <a:lnTo>
-                    <a:pt x="3939238" y="2947068"/>
-                  </a:lnTo>
-                  <a:lnTo>
-                    <a:pt x="3867616" y="2924203"/>
-                  </a:lnTo>
-                  <a:lnTo>
-                    <a:pt x="3795993" y="2900364"/>
-                  </a:lnTo>
-                  <a:lnTo>
-                    <a:pt x="3724371" y="2875510"/>
-                  </a:lnTo>
-                  <a:lnTo>
-                    <a:pt x="3652748" y="2849596"/>
-                  </a:lnTo>
-                  <a:lnTo>
-                    <a:pt x="3581126" y="2822579"/>
-                  </a:lnTo>
-                  <a:lnTo>
-                    <a:pt x="3509503" y="2794410"/>
-                  </a:lnTo>
-                  <a:lnTo>
-                    <a:pt x="3437881" y="2765041"/>
-                  </a:lnTo>
-                  <a:lnTo>
-                    <a:pt x="3366258" y="2734421"/>
-                  </a:lnTo>
-                  <a:lnTo>
-                    <a:pt x="3294636" y="2702497"/>
-                  </a:lnTo>
-                  <a:lnTo>
-                    <a:pt x="3223013" y="2669212"/>
-                  </a:lnTo>
-                  <a:lnTo>
-                    <a:pt x="3151391" y="2652277"/>
-                  </a:lnTo>
-                  <a:lnTo>
-                    <a:pt x="3079768" y="2648713"/>
-                  </a:lnTo>
-                  <a:lnTo>
-                    <a:pt x="3008146" y="2645133"/>
-                  </a:lnTo>
-                  <a:lnTo>
-                    <a:pt x="2936523" y="2641538"/>
-                  </a:lnTo>
-                  <a:lnTo>
-                    <a:pt x="2864901" y="2637928"/>
-                  </a:lnTo>
-                  <a:lnTo>
-                    <a:pt x="2793278" y="2634302"/>
-                  </a:lnTo>
-                  <a:lnTo>
-                    <a:pt x="2721655" y="2630661"/>
-                  </a:lnTo>
-                  <a:lnTo>
-                    <a:pt x="2650033" y="2627004"/>
-                  </a:lnTo>
-                  <a:lnTo>
-                    <a:pt x="2578410" y="2623331"/>
-                  </a:lnTo>
-                  <a:lnTo>
-                    <a:pt x="2506788" y="2619643"/>
-                  </a:lnTo>
-                  <a:lnTo>
-                    <a:pt x="2435165" y="2615939"/>
-                  </a:lnTo>
-                  <a:lnTo>
-                    <a:pt x="2363543" y="2612219"/>
-                  </a:lnTo>
-                  <a:lnTo>
-                    <a:pt x="2291920" y="2608483"/>
-                  </a:lnTo>
-                  <a:lnTo>
-                    <a:pt x="2220298" y="2604731"/>
-                  </a:lnTo>
-                  <a:lnTo>
-                    <a:pt x="2148675" y="2600963"/>
-                  </a:lnTo>
-                  <a:lnTo>
-                    <a:pt x="2077053" y="2597179"/>
-                  </a:lnTo>
-                  <a:lnTo>
-                    <a:pt x="2005430" y="2593378"/>
-                  </a:lnTo>
-                  <a:lnTo>
-                    <a:pt x="1933808" y="2589561"/>
-                  </a:lnTo>
-                  <a:lnTo>
-                    <a:pt x="1862185" y="2585728"/>
-                  </a:lnTo>
-                  <a:lnTo>
-                    <a:pt x="1790563" y="2581879"/>
-                  </a:lnTo>
-                  <a:lnTo>
-                    <a:pt x="1718940" y="2578013"/>
-                  </a:lnTo>
-                  <a:lnTo>
-                    <a:pt x="1647318" y="2574130"/>
-                  </a:lnTo>
-                  <a:lnTo>
-                    <a:pt x="1575695" y="2570231"/>
-                  </a:lnTo>
-                  <a:lnTo>
-                    <a:pt x="1504073" y="2566315"/>
-                  </a:lnTo>
-                  <a:lnTo>
-                    <a:pt x="1432450" y="2562382"/>
-                  </a:lnTo>
-                  <a:lnTo>
-                    <a:pt x="1360827" y="2558433"/>
-                  </a:lnTo>
-                  <a:lnTo>
-                    <a:pt x="1289205" y="2554466"/>
-                  </a:lnTo>
-                  <a:lnTo>
-                    <a:pt x="1217582" y="2550483"/>
-                  </a:lnTo>
-                  <a:lnTo>
-                    <a:pt x="1145960" y="2546482"/>
-                  </a:lnTo>
-                  <a:lnTo>
-                    <a:pt x="1074337" y="2542464"/>
-                  </a:lnTo>
-                  <a:lnTo>
-                    <a:pt x="1002715" y="2538429"/>
-                  </a:lnTo>
-                  <a:lnTo>
-                    <a:pt x="931092" y="2534377"/>
-                  </a:lnTo>
-                  <a:lnTo>
-                    <a:pt x="859470" y="2530307"/>
-                  </a:lnTo>
-                  <a:lnTo>
-                    <a:pt x="787847" y="2526220"/>
-                  </a:lnTo>
-                  <a:lnTo>
-                    <a:pt x="716225" y="2522116"/>
-                  </a:lnTo>
-                  <a:lnTo>
-                    <a:pt x="644602" y="2517993"/>
-                  </a:lnTo>
-                  <a:lnTo>
-                    <a:pt x="572980" y="2513853"/>
-                  </a:lnTo>
-                  <a:lnTo>
-                    <a:pt x="501357" y="2509696"/>
-                  </a:lnTo>
-                  <a:lnTo>
-                    <a:pt x="429735" y="2505520"/>
-                  </a:lnTo>
-                  <a:lnTo>
-                    <a:pt x="358112" y="2501327"/>
-                  </a:lnTo>
-                  <a:lnTo>
-                    <a:pt x="286490" y="2497116"/>
-                  </a:lnTo>
-                  <a:lnTo>
-                    <a:pt x="214867" y="2492886"/>
-                  </a:lnTo>
-                  <a:lnTo>
-                    <a:pt x="143245" y="2488639"/>
-                  </a:lnTo>
-                  <a:lnTo>
-                    <a:pt x="71622" y="2484373"/>
-                  </a:lnTo>
-                  <a:lnTo>
-                    <a:pt x="0" y="2480089"/>
+                    <a:pt x="787847" y="138785"/>
+                  </a:lnTo>
+                  <a:lnTo>
+                    <a:pt x="859470" y="274903"/>
+                  </a:lnTo>
+                  <a:lnTo>
+                    <a:pt x="931092" y="405482"/>
+                  </a:lnTo>
+                  <a:lnTo>
+                    <a:pt x="1002715" y="530747"/>
+                  </a:lnTo>
+                  <a:lnTo>
+                    <a:pt x="1074337" y="650915"/>
+                  </a:lnTo>
+                  <a:lnTo>
+                    <a:pt x="1145960" y="766193"/>
+                  </a:lnTo>
+                  <a:lnTo>
+                    <a:pt x="1217582" y="876779"/>
+                  </a:lnTo>
+                  <a:lnTo>
+                    <a:pt x="1289205" y="982866"/>
+                  </a:lnTo>
+                  <a:lnTo>
+                    <a:pt x="1360827" y="1084635"/>
+                  </a:lnTo>
+                  <a:lnTo>
+                    <a:pt x="1432450" y="1182264"/>
+                  </a:lnTo>
+                  <a:lnTo>
+                    <a:pt x="1504073" y="1275919"/>
+                  </a:lnTo>
+                  <a:lnTo>
+                    <a:pt x="1575695" y="1365763"/>
+                  </a:lnTo>
+                  <a:lnTo>
+                    <a:pt x="1647318" y="1451951"/>
+                  </a:lnTo>
+                  <a:lnTo>
+                    <a:pt x="1718940" y="1534632"/>
+                  </a:lnTo>
+                  <a:lnTo>
+                    <a:pt x="1790563" y="1613948"/>
+                  </a:lnTo>
+                  <a:lnTo>
+                    <a:pt x="1862185" y="1690037"/>
+                  </a:lnTo>
+                  <a:lnTo>
+                    <a:pt x="1933808" y="1763029"/>
+                  </a:lnTo>
+                  <a:lnTo>
+                    <a:pt x="2005430" y="1833051"/>
+                  </a:lnTo>
+                  <a:lnTo>
+                    <a:pt x="2077053" y="1900224"/>
+                  </a:lnTo>
+                  <a:lnTo>
+                    <a:pt x="2148675" y="1964663"/>
+                  </a:lnTo>
+                  <a:lnTo>
+                    <a:pt x="2220298" y="2026479"/>
+                  </a:lnTo>
+                  <a:lnTo>
+                    <a:pt x="2291920" y="2085781"/>
+                  </a:lnTo>
+                  <a:lnTo>
+                    <a:pt x="2363543" y="2142669"/>
+                  </a:lnTo>
+                  <a:lnTo>
+                    <a:pt x="2435165" y="2197242"/>
+                  </a:lnTo>
+                  <a:lnTo>
+                    <a:pt x="2506788" y="2249594"/>
+                  </a:lnTo>
+                  <a:lnTo>
+                    <a:pt x="2578410" y="2299816"/>
+                  </a:lnTo>
+                  <a:lnTo>
+                    <a:pt x="2650033" y="2347994"/>
+                  </a:lnTo>
+                  <a:lnTo>
+                    <a:pt x="2721655" y="2394212"/>
+                  </a:lnTo>
+                  <a:lnTo>
+                    <a:pt x="2793278" y="2438549"/>
+                  </a:lnTo>
+                  <a:lnTo>
+                    <a:pt x="2864901" y="2481082"/>
+                  </a:lnTo>
+                  <a:lnTo>
+                    <a:pt x="2936523" y="2521884"/>
+                  </a:lnTo>
+                  <a:lnTo>
+                    <a:pt x="3008146" y="2561025"/>
+                  </a:lnTo>
+                  <a:lnTo>
+                    <a:pt x="3079768" y="2598574"/>
+                  </a:lnTo>
+                  <a:lnTo>
+                    <a:pt x="3151391" y="2634595"/>
+                  </a:lnTo>
+                  <a:lnTo>
+                    <a:pt x="3223013" y="2655816"/>
+                  </a:lnTo>
+                  <a:lnTo>
+                    <a:pt x="3294636" y="2659326"/>
+                  </a:lnTo>
+                  <a:lnTo>
+                    <a:pt x="3366258" y="2662822"/>
+                  </a:lnTo>
+                  <a:lnTo>
+                    <a:pt x="3437881" y="2666303"/>
+                  </a:lnTo>
+                  <a:lnTo>
+                    <a:pt x="3509503" y="2669769"/>
+                  </a:lnTo>
+                  <a:lnTo>
+                    <a:pt x="3581126" y="2673220"/>
+                  </a:lnTo>
+                  <a:lnTo>
+                    <a:pt x="3652748" y="2676657"/>
+                  </a:lnTo>
+                  <a:lnTo>
+                    <a:pt x="3724371" y="2680079"/>
+                  </a:lnTo>
+                  <a:lnTo>
+                    <a:pt x="3795993" y="2683486"/>
+                  </a:lnTo>
+                  <a:lnTo>
+                    <a:pt x="3867616" y="2686879"/>
+                  </a:lnTo>
+                  <a:lnTo>
+                    <a:pt x="3939238" y="2690258"/>
+                  </a:lnTo>
+                  <a:lnTo>
+                    <a:pt x="4010861" y="2693623"/>
+                  </a:lnTo>
+                  <a:lnTo>
+                    <a:pt x="4082483" y="2696973"/>
+                  </a:lnTo>
+                  <a:lnTo>
+                    <a:pt x="4154106" y="2700309"/>
+                  </a:lnTo>
+                  <a:lnTo>
+                    <a:pt x="4225729" y="2703630"/>
+                  </a:lnTo>
+                  <a:lnTo>
+                    <a:pt x="4297351" y="2706938"/>
+                  </a:lnTo>
+                  <a:lnTo>
+                    <a:pt x="4368974" y="2710232"/>
+                  </a:lnTo>
+                  <a:lnTo>
+                    <a:pt x="4440596" y="2713512"/>
+                  </a:lnTo>
+                  <a:lnTo>
+                    <a:pt x="4512219" y="2716777"/>
+                  </a:lnTo>
+                  <a:lnTo>
+                    <a:pt x="4583841" y="2720029"/>
+                  </a:lnTo>
+                  <a:lnTo>
+                    <a:pt x="4655464" y="2723268"/>
+                  </a:lnTo>
+                  <a:lnTo>
+                    <a:pt x="4727086" y="2726492"/>
+                  </a:lnTo>
+                  <a:lnTo>
+                    <a:pt x="4798709" y="2729703"/>
+                  </a:lnTo>
+                  <a:lnTo>
+                    <a:pt x="4870331" y="2732900"/>
+                  </a:lnTo>
+                  <a:lnTo>
+                    <a:pt x="4941954" y="2736084"/>
+                  </a:lnTo>
+                  <a:lnTo>
+                    <a:pt x="5013576" y="2739254"/>
+                  </a:lnTo>
+                  <a:lnTo>
+                    <a:pt x="5085199" y="2742411"/>
+                  </a:lnTo>
+                  <a:lnTo>
+                    <a:pt x="5156821" y="2745554"/>
+                  </a:lnTo>
+                  <a:lnTo>
+                    <a:pt x="5228444" y="2748684"/>
+                  </a:lnTo>
+                  <a:lnTo>
+                    <a:pt x="5300066" y="2751800"/>
+                  </a:lnTo>
+                  <a:lnTo>
+                    <a:pt x="5371689" y="2754904"/>
+                  </a:lnTo>
+                  <a:lnTo>
+                    <a:pt x="5443311" y="2757994"/>
+                  </a:lnTo>
+                  <a:lnTo>
+                    <a:pt x="5514934" y="2761072"/>
+                  </a:lnTo>
+                  <a:lnTo>
+                    <a:pt x="5586557" y="2764136"/>
+                  </a:lnTo>
+                  <a:lnTo>
+                    <a:pt x="5658179" y="2767187"/>
+                  </a:lnTo>
+                  <a:lnTo>
+                    <a:pt x="5729802" y="2770225"/>
+                  </a:lnTo>
+                  <a:lnTo>
+                    <a:pt x="5801424" y="2773250"/>
+                  </a:lnTo>
+                  <a:lnTo>
+                    <a:pt x="5873047" y="2776263"/>
+                  </a:lnTo>
+                  <a:lnTo>
+                    <a:pt x="5944669" y="2779263"/>
+                  </a:lnTo>
+                  <a:lnTo>
+                    <a:pt x="6016292" y="2782250"/>
+                  </a:lnTo>
+                  <a:lnTo>
+                    <a:pt x="6087914" y="2785224"/>
+                  </a:lnTo>
+                  <a:lnTo>
+                    <a:pt x="6159537" y="2788186"/>
+                  </a:lnTo>
+                  <a:lnTo>
+                    <a:pt x="6231159" y="2791135"/>
+                  </a:lnTo>
+                  <a:lnTo>
+                    <a:pt x="6302782" y="2794072"/>
+                  </a:lnTo>
+                  <a:lnTo>
+                    <a:pt x="6374404" y="2796996"/>
+                  </a:lnTo>
+                  <a:lnTo>
+                    <a:pt x="6446027" y="2799908"/>
+                  </a:lnTo>
+                  <a:lnTo>
+                    <a:pt x="6517649" y="2802807"/>
+                  </a:lnTo>
+                  <a:lnTo>
+                    <a:pt x="6589272" y="2805695"/>
+                  </a:lnTo>
+                  <a:lnTo>
+                    <a:pt x="6660894" y="2808570"/>
+                  </a:lnTo>
+                  <a:lnTo>
+                    <a:pt x="6732517" y="2811432"/>
+                  </a:lnTo>
+                  <a:lnTo>
+                    <a:pt x="6804139" y="2814283"/>
+                  </a:lnTo>
+                  <a:lnTo>
+                    <a:pt x="6875762" y="2817122"/>
+                  </a:lnTo>
+                  <a:lnTo>
+                    <a:pt x="6947385" y="2819948"/>
+                  </a:lnTo>
+                  <a:lnTo>
+                    <a:pt x="7019007" y="2822763"/>
+                  </a:lnTo>
+                  <a:lnTo>
+                    <a:pt x="7090630" y="2825565"/>
+                  </a:lnTo>
+                  <a:lnTo>
+                    <a:pt x="7090630" y="3397321"/>
+                  </a:lnTo>
+                  <a:lnTo>
+                    <a:pt x="7019007" y="3393655"/>
+                  </a:lnTo>
+                  <a:lnTo>
+                    <a:pt x="6947385" y="3389833"/>
+                  </a:lnTo>
+                  <a:lnTo>
+                    <a:pt x="6875762" y="3385849"/>
+                  </a:lnTo>
+                  <a:lnTo>
+                    <a:pt x="6804139" y="3381696"/>
+                  </a:lnTo>
+                  <a:lnTo>
+                    <a:pt x="6732517" y="3377368"/>
+                  </a:lnTo>
+                  <a:lnTo>
+                    <a:pt x="6660894" y="3372855"/>
+                  </a:lnTo>
+                  <a:lnTo>
+                    <a:pt x="6589272" y="3368151"/>
+                  </a:lnTo>
+                  <a:lnTo>
+                    <a:pt x="6517649" y="3363247"/>
+                  </a:lnTo>
+                  <a:lnTo>
+                    <a:pt x="6446027" y="3358136"/>
+                  </a:lnTo>
+                  <a:lnTo>
+                    <a:pt x="6374404" y="3352808"/>
+                  </a:lnTo>
+                  <a:lnTo>
+                    <a:pt x="6302782" y="3347253"/>
+                  </a:lnTo>
+                  <a:lnTo>
+                    <a:pt x="6231159" y="3341463"/>
+                  </a:lnTo>
+                  <a:lnTo>
+                    <a:pt x="6159537" y="3335428"/>
+                  </a:lnTo>
+                  <a:lnTo>
+                    <a:pt x="6087914" y="3329136"/>
+                  </a:lnTo>
+                  <a:lnTo>
+                    <a:pt x="6016292" y="3322577"/>
+                  </a:lnTo>
+                  <a:lnTo>
+                    <a:pt x="5944669" y="3315741"/>
+                  </a:lnTo>
+                  <a:lnTo>
+                    <a:pt x="5873047" y="3308614"/>
+                  </a:lnTo>
+                  <a:lnTo>
+                    <a:pt x="5801424" y="3301185"/>
+                  </a:lnTo>
+                  <a:lnTo>
+                    <a:pt x="5729802" y="3293441"/>
+                  </a:lnTo>
+                  <a:lnTo>
+                    <a:pt x="5658179" y="3285368"/>
+                  </a:lnTo>
+                  <a:lnTo>
+                    <a:pt x="5586557" y="3276953"/>
+                  </a:lnTo>
+                  <a:lnTo>
+                    <a:pt x="5514934" y="3268181"/>
+                  </a:lnTo>
+                  <a:lnTo>
+                    <a:pt x="5443311" y="3259037"/>
+                  </a:lnTo>
+                  <a:lnTo>
+                    <a:pt x="5371689" y="3249504"/>
+                  </a:lnTo>
+                  <a:lnTo>
+                    <a:pt x="5300066" y="3239568"/>
+                  </a:lnTo>
+                  <a:lnTo>
+                    <a:pt x="5228444" y="3229210"/>
+                  </a:lnTo>
+                  <a:lnTo>
+                    <a:pt x="5156821" y="3218413"/>
+                  </a:lnTo>
+                  <a:lnTo>
+                    <a:pt x="5085199" y="3207157"/>
+                  </a:lnTo>
+                  <a:lnTo>
+                    <a:pt x="5013576" y="3195424"/>
+                  </a:lnTo>
+                  <a:lnTo>
+                    <a:pt x="4941954" y="3183194"/>
+                  </a:lnTo>
+                  <a:lnTo>
+                    <a:pt x="4870331" y="3170445"/>
+                  </a:lnTo>
+                  <a:lnTo>
+                    <a:pt x="4798709" y="3157154"/>
+                  </a:lnTo>
+                  <a:lnTo>
+                    <a:pt x="4727086" y="3143300"/>
+                  </a:lnTo>
+                  <a:lnTo>
+                    <a:pt x="4655464" y="3128859"/>
+                  </a:lnTo>
+                  <a:lnTo>
+                    <a:pt x="4583841" y="3113805"/>
+                  </a:lnTo>
+                  <a:lnTo>
+                    <a:pt x="4512219" y="3098112"/>
+                  </a:lnTo>
+                  <a:lnTo>
+                    <a:pt x="4440596" y="3081753"/>
+                  </a:lnTo>
+                  <a:lnTo>
+                    <a:pt x="4368974" y="3064701"/>
+                  </a:lnTo>
+                  <a:lnTo>
+                    <a:pt x="4297351" y="3046925"/>
+                  </a:lnTo>
+                  <a:lnTo>
+                    <a:pt x="4225729" y="3028395"/>
+                  </a:lnTo>
+                  <a:lnTo>
+                    <a:pt x="4154106" y="3009079"/>
+                  </a:lnTo>
+                  <a:lnTo>
+                    <a:pt x="4082483" y="2988944"/>
+                  </a:lnTo>
+                  <a:lnTo>
+                    <a:pt x="4010861" y="2967955"/>
+                  </a:lnTo>
+                  <a:lnTo>
+                    <a:pt x="3939238" y="2946075"/>
+                  </a:lnTo>
+                  <a:lnTo>
+                    <a:pt x="3867616" y="2923267"/>
+                  </a:lnTo>
+                  <a:lnTo>
+                    <a:pt x="3795993" y="2899492"/>
+                  </a:lnTo>
+                  <a:lnTo>
+                    <a:pt x="3724371" y="2874708"/>
+                  </a:lnTo>
+                  <a:lnTo>
+                    <a:pt x="3652748" y="2848873"/>
+                  </a:lnTo>
+                  <a:lnTo>
+                    <a:pt x="3581126" y="2821942"/>
+                  </a:lnTo>
+                  <a:lnTo>
+                    <a:pt x="3509503" y="2793868"/>
+                  </a:lnTo>
+                  <a:lnTo>
+                    <a:pt x="3437881" y="2764604"/>
+                  </a:lnTo>
+                  <a:lnTo>
+                    <a:pt x="3366258" y="2734098"/>
+                  </a:lnTo>
+                  <a:lnTo>
+                    <a:pt x="3294636" y="2702298"/>
+                  </a:lnTo>
+                  <a:lnTo>
+                    <a:pt x="3223013" y="2669149"/>
+                  </a:lnTo>
+                  <a:lnTo>
+                    <a:pt x="3151391" y="2652290"/>
+                  </a:lnTo>
+                  <a:lnTo>
+                    <a:pt x="3079768" y="2648750"/>
+                  </a:lnTo>
+                  <a:lnTo>
+                    <a:pt x="3008146" y="2645194"/>
+                  </a:lnTo>
+                  <a:lnTo>
+                    <a:pt x="2936523" y="2641624"/>
+                  </a:lnTo>
+                  <a:lnTo>
+                    <a:pt x="2864901" y="2638038"/>
+                  </a:lnTo>
+                  <a:lnTo>
+                    <a:pt x="2793278" y="2634437"/>
+                  </a:lnTo>
+                  <a:lnTo>
+                    <a:pt x="2721655" y="2630820"/>
+                  </a:lnTo>
+                  <a:lnTo>
+                    <a:pt x="2650033" y="2627189"/>
+                  </a:lnTo>
+                  <a:lnTo>
+                    <a:pt x="2578410" y="2623541"/>
+                  </a:lnTo>
+                  <a:lnTo>
+                    <a:pt x="2506788" y="2619878"/>
+                  </a:lnTo>
+                  <a:lnTo>
+                    <a:pt x="2435165" y="2616200"/>
+                  </a:lnTo>
+                  <a:lnTo>
+                    <a:pt x="2363543" y="2612506"/>
+                  </a:lnTo>
+                  <a:lnTo>
+                    <a:pt x="2291920" y="2608796"/>
+                  </a:lnTo>
+                  <a:lnTo>
+                    <a:pt x="2220298" y="2605070"/>
+                  </a:lnTo>
+                  <a:lnTo>
+                    <a:pt x="2148675" y="2601329"/>
+                  </a:lnTo>
+                  <a:lnTo>
+                    <a:pt x="2077053" y="2597571"/>
+                  </a:lnTo>
+                  <a:lnTo>
+                    <a:pt x="2005430" y="2593798"/>
+                  </a:lnTo>
+                  <a:lnTo>
+                    <a:pt x="1933808" y="2590009"/>
+                  </a:lnTo>
+                  <a:lnTo>
+                    <a:pt x="1862185" y="2586203"/>
+                  </a:lnTo>
+                  <a:lnTo>
+                    <a:pt x="1790563" y="2582381"/>
+                  </a:lnTo>
+                  <a:lnTo>
+                    <a:pt x="1718940" y="2578543"/>
+                  </a:lnTo>
+                  <a:lnTo>
+                    <a:pt x="1647318" y="2574689"/>
+                  </a:lnTo>
+                  <a:lnTo>
+                    <a:pt x="1575695" y="2570818"/>
+                  </a:lnTo>
+                  <a:lnTo>
+                    <a:pt x="1504073" y="2566930"/>
+                  </a:lnTo>
+                  <a:lnTo>
+                    <a:pt x="1432450" y="2563026"/>
+                  </a:lnTo>
+                  <a:lnTo>
+                    <a:pt x="1360827" y="2559106"/>
+                  </a:lnTo>
+                  <a:lnTo>
+                    <a:pt x="1289205" y="2555169"/>
+                  </a:lnTo>
+                  <a:lnTo>
+                    <a:pt x="1217582" y="2551215"/>
+                  </a:lnTo>
+                  <a:lnTo>
+                    <a:pt x="1145960" y="2547244"/>
+                  </a:lnTo>
+                  <a:lnTo>
+                    <a:pt x="1074337" y="2543256"/>
+                  </a:lnTo>
+                  <a:lnTo>
+                    <a:pt x="1002715" y="2539252"/>
+                  </a:lnTo>
+                  <a:lnTo>
+                    <a:pt x="931092" y="2535230"/>
+                  </a:lnTo>
+                  <a:lnTo>
+                    <a:pt x="859470" y="2531191"/>
+                  </a:lnTo>
+                  <a:lnTo>
+                    <a:pt x="787847" y="2527135"/>
+                  </a:lnTo>
+                  <a:lnTo>
+                    <a:pt x="716225" y="2523061"/>
+                  </a:lnTo>
+                  <a:lnTo>
+                    <a:pt x="644602" y="2518971"/>
+                  </a:lnTo>
+                  <a:lnTo>
+                    <a:pt x="572980" y="2514863"/>
+                  </a:lnTo>
+                  <a:lnTo>
+                    <a:pt x="501357" y="2510737"/>
+                  </a:lnTo>
+                  <a:lnTo>
+                    <a:pt x="429735" y="2506594"/>
+                  </a:lnTo>
+                  <a:lnTo>
+                    <a:pt x="358112" y="2502433"/>
+                  </a:lnTo>
+                  <a:lnTo>
+                    <a:pt x="286490" y="2498255"/>
+                  </a:lnTo>
+                  <a:lnTo>
+                    <a:pt x="214867" y="2494058"/>
+                  </a:lnTo>
+                  <a:lnTo>
+                    <a:pt x="143245" y="2489844"/>
+                  </a:lnTo>
+                  <a:lnTo>
+                    <a:pt x="71622" y="2485612"/>
+                  </a:lnTo>
+                  <a:lnTo>
+                    <a:pt x="0" y="2481362"/>
                   </a:lnTo>
                   <a:close/>
                 </a:path>
@@ -3990,282 +3990,282 @@
           </p:nvSpPr>
           <p:spPr>
             <a:xfrm>
-              <a:off x="1900526" y="2073503"/>
-              <a:ext cx="6362152" cy="2826585"/>
+              <a:off x="1889842" y="2073503"/>
+              <a:ext cx="6372836" cy="2825565"/>
             </a:xfrm>
             <a:custGeom>
               <a:avLst/>
               <a:pathLst>
-                <a:path w="6362152" h="2826585">
+                <a:path w="6372836" h="2825565">
                   <a:moveTo>
                     <a:pt x="0" y="0"/>
                   </a:moveTo>
                   <a:lnTo>
-                    <a:pt x="59370" y="118836"/>
-                  </a:lnTo>
-                  <a:lnTo>
-                    <a:pt x="130993" y="256338"/>
-                  </a:lnTo>
-                  <a:lnTo>
-                    <a:pt x="202615" y="388221"/>
-                  </a:lnTo>
-                  <a:lnTo>
-                    <a:pt x="274238" y="514714"/>
-                  </a:lnTo>
-                  <a:lnTo>
-                    <a:pt x="345860" y="636039"/>
-                  </a:lnTo>
-                  <a:lnTo>
-                    <a:pt x="417483" y="752406"/>
-                  </a:lnTo>
-                  <a:lnTo>
-                    <a:pt x="489105" y="864018"/>
-                  </a:lnTo>
-                  <a:lnTo>
-                    <a:pt x="560728" y="971069"/>
-                  </a:lnTo>
-                  <a:lnTo>
-                    <a:pt x="632350" y="1073745"/>
-                  </a:lnTo>
-                  <a:lnTo>
-                    <a:pt x="703973" y="1172226"/>
-                  </a:lnTo>
-                  <a:lnTo>
-                    <a:pt x="775595" y="1266683"/>
-                  </a:lnTo>
-                  <a:lnTo>
-                    <a:pt x="847218" y="1357280"/>
-                  </a:lnTo>
-                  <a:lnTo>
-                    <a:pt x="918840" y="1444174"/>
-                  </a:lnTo>
-                  <a:lnTo>
-                    <a:pt x="990463" y="1527518"/>
-                  </a:lnTo>
-                  <a:lnTo>
-                    <a:pt x="1062086" y="1607456"/>
-                  </a:lnTo>
-                  <a:lnTo>
-                    <a:pt x="1133708" y="1684128"/>
-                  </a:lnTo>
-                  <a:lnTo>
-                    <a:pt x="1205331" y="1757666"/>
-                  </a:lnTo>
-                  <a:lnTo>
-                    <a:pt x="1276953" y="1828200"/>
-                  </a:lnTo>
-                  <a:lnTo>
-                    <a:pt x="1348576" y="1895851"/>
-                  </a:lnTo>
-                  <a:lnTo>
-                    <a:pt x="1420198" y="1960738"/>
-                  </a:lnTo>
-                  <a:lnTo>
-                    <a:pt x="1491821" y="2022973"/>
-                  </a:lnTo>
-                  <a:lnTo>
-                    <a:pt x="1563443" y="2082665"/>
-                  </a:lnTo>
-                  <a:lnTo>
-                    <a:pt x="1635066" y="2139918"/>
-                  </a:lnTo>
-                  <a:lnTo>
-                    <a:pt x="1706688" y="2194832"/>
-                  </a:lnTo>
-                  <a:lnTo>
-                    <a:pt x="1778311" y="2247501"/>
-                  </a:lnTo>
-                  <a:lnTo>
-                    <a:pt x="1849933" y="2298018"/>
-                  </a:lnTo>
-                  <a:lnTo>
-                    <a:pt x="1921556" y="2346471"/>
-                  </a:lnTo>
-                  <a:lnTo>
-                    <a:pt x="1993178" y="2392944"/>
-                  </a:lnTo>
-                  <a:lnTo>
-                    <a:pt x="2064801" y="2437518"/>
-                  </a:lnTo>
-                  <a:lnTo>
-                    <a:pt x="2136423" y="2480270"/>
-                  </a:lnTo>
-                  <a:lnTo>
-                    <a:pt x="2208046" y="2521276"/>
-                  </a:lnTo>
-                  <a:lnTo>
-                    <a:pt x="2279668" y="2560606"/>
-                  </a:lnTo>
-                  <a:lnTo>
-                    <a:pt x="2351291" y="2598328"/>
-                  </a:lnTo>
-                  <a:lnTo>
-                    <a:pt x="2422914" y="2634510"/>
-                  </a:lnTo>
-                  <a:lnTo>
-                    <a:pt x="2494536" y="2655826"/>
-                  </a:lnTo>
-                  <a:lnTo>
-                    <a:pt x="2566159" y="2659360"/>
-                  </a:lnTo>
-                  <a:lnTo>
-                    <a:pt x="2637781" y="2662879"/>
-                  </a:lnTo>
-                  <a:lnTo>
-                    <a:pt x="2709404" y="2666383"/>
-                  </a:lnTo>
-                  <a:lnTo>
-                    <a:pt x="2781026" y="2669871"/>
-                  </a:lnTo>
-                  <a:lnTo>
-                    <a:pt x="2852649" y="2673345"/>
-                  </a:lnTo>
-                  <a:lnTo>
-                    <a:pt x="2924271" y="2676804"/>
-                  </a:lnTo>
-                  <a:lnTo>
-                    <a:pt x="2995894" y="2680249"/>
-                  </a:lnTo>
-                  <a:lnTo>
-                    <a:pt x="3067516" y="2683678"/>
-                  </a:lnTo>
-                  <a:lnTo>
-                    <a:pt x="3139139" y="2687093"/>
-                  </a:lnTo>
-                  <a:lnTo>
-                    <a:pt x="3210761" y="2690494"/>
-                  </a:lnTo>
-                  <a:lnTo>
-                    <a:pt x="3282384" y="2693880"/>
-                  </a:lnTo>
-                  <a:lnTo>
-                    <a:pt x="3354006" y="2697251"/>
-                  </a:lnTo>
-                  <a:lnTo>
-                    <a:pt x="3425629" y="2700608"/>
-                  </a:lnTo>
-                  <a:lnTo>
-                    <a:pt x="3497251" y="2703951"/>
-                  </a:lnTo>
-                  <a:lnTo>
-                    <a:pt x="3568874" y="2707280"/>
-                  </a:lnTo>
-                  <a:lnTo>
-                    <a:pt x="3640496" y="2710594"/>
-                  </a:lnTo>
-                  <a:lnTo>
-                    <a:pt x="3712119" y="2713894"/>
-                  </a:lnTo>
-                  <a:lnTo>
-                    <a:pt x="3783742" y="2717180"/>
-                  </a:lnTo>
-                  <a:lnTo>
-                    <a:pt x="3855364" y="2720452"/>
-                  </a:lnTo>
-                  <a:lnTo>
-                    <a:pt x="3926987" y="2723710"/>
-                  </a:lnTo>
-                  <a:lnTo>
-                    <a:pt x="3998609" y="2726954"/>
-                  </a:lnTo>
-                  <a:lnTo>
-                    <a:pt x="4070232" y="2730184"/>
-                  </a:lnTo>
-                  <a:lnTo>
-                    <a:pt x="4141854" y="2733401"/>
-                  </a:lnTo>
-                  <a:lnTo>
-                    <a:pt x="4213477" y="2736604"/>
-                  </a:lnTo>
-                  <a:lnTo>
-                    <a:pt x="4285099" y="2739793"/>
-                  </a:lnTo>
-                  <a:lnTo>
-                    <a:pt x="4356722" y="2742968"/>
-                  </a:lnTo>
-                  <a:lnTo>
-                    <a:pt x="4428344" y="2746130"/>
-                  </a:lnTo>
-                  <a:lnTo>
-                    <a:pt x="4499967" y="2749279"/>
-                  </a:lnTo>
-                  <a:lnTo>
-                    <a:pt x="4571589" y="2752414"/>
-                  </a:lnTo>
-                  <a:lnTo>
-                    <a:pt x="4643212" y="2755535"/>
-                  </a:lnTo>
-                  <a:lnTo>
-                    <a:pt x="4714834" y="2758644"/>
-                  </a:lnTo>
-                  <a:lnTo>
-                    <a:pt x="4786457" y="2761739"/>
-                  </a:lnTo>
-                  <a:lnTo>
-                    <a:pt x="4858079" y="2764820"/>
-                  </a:lnTo>
-                  <a:lnTo>
-                    <a:pt x="4929702" y="2767889"/>
-                  </a:lnTo>
-                  <a:lnTo>
-                    <a:pt x="5001324" y="2770945"/>
-                  </a:lnTo>
-                  <a:lnTo>
-                    <a:pt x="5072947" y="2773987"/>
-                  </a:lnTo>
-                  <a:lnTo>
-                    <a:pt x="5144570" y="2777017"/>
-                  </a:lnTo>
-                  <a:lnTo>
-                    <a:pt x="5216192" y="2780033"/>
-                  </a:lnTo>
-                  <a:lnTo>
-                    <a:pt x="5287815" y="2783037"/>
-                  </a:lnTo>
-                  <a:lnTo>
-                    <a:pt x="5359437" y="2786028"/>
-                  </a:lnTo>
-                  <a:lnTo>
-                    <a:pt x="5431060" y="2789006"/>
-                  </a:lnTo>
-                  <a:lnTo>
-                    <a:pt x="5502682" y="2791971"/>
-                  </a:lnTo>
-                  <a:lnTo>
-                    <a:pt x="5574305" y="2794924"/>
-                  </a:lnTo>
-                  <a:lnTo>
-                    <a:pt x="5645927" y="2797864"/>
-                  </a:lnTo>
-                  <a:lnTo>
-                    <a:pt x="5717550" y="2800792"/>
-                  </a:lnTo>
-                  <a:lnTo>
-                    <a:pt x="5789172" y="2803707"/>
-                  </a:lnTo>
-                  <a:lnTo>
-                    <a:pt x="5860795" y="2806610"/>
-                  </a:lnTo>
-                  <a:lnTo>
-                    <a:pt x="5932417" y="2809500"/>
-                  </a:lnTo>
-                  <a:lnTo>
-                    <a:pt x="6004040" y="2812378"/>
-                  </a:lnTo>
-                  <a:lnTo>
-                    <a:pt x="6075662" y="2815244"/>
-                  </a:lnTo>
-                  <a:lnTo>
-                    <a:pt x="6147285" y="2818097"/>
-                  </a:lnTo>
-                  <a:lnTo>
-                    <a:pt x="6218907" y="2820938"/>
-                  </a:lnTo>
-                  <a:lnTo>
-                    <a:pt x="6290530" y="2823768"/>
-                  </a:lnTo>
-                  <a:lnTo>
-                    <a:pt x="6362152" y="2826585"/>
+                    <a:pt x="70054" y="138785"/>
+                  </a:lnTo>
+                  <a:lnTo>
+                    <a:pt x="141676" y="274903"/>
+                  </a:lnTo>
+                  <a:lnTo>
+                    <a:pt x="213299" y="405482"/>
+                  </a:lnTo>
+                  <a:lnTo>
+                    <a:pt x="284921" y="530747"/>
+                  </a:lnTo>
+                  <a:lnTo>
+                    <a:pt x="356544" y="650915"/>
+                  </a:lnTo>
+                  <a:lnTo>
+                    <a:pt x="428166" y="766193"/>
+                  </a:lnTo>
+                  <a:lnTo>
+                    <a:pt x="499789" y="876779"/>
+                  </a:lnTo>
+                  <a:lnTo>
+                    <a:pt x="571412" y="982866"/>
+                  </a:lnTo>
+                  <a:lnTo>
+                    <a:pt x="643034" y="1084635"/>
+                  </a:lnTo>
+                  <a:lnTo>
+                    <a:pt x="714657" y="1182264"/>
+                  </a:lnTo>
+                  <a:lnTo>
+                    <a:pt x="786279" y="1275919"/>
+                  </a:lnTo>
+                  <a:lnTo>
+                    <a:pt x="857902" y="1365763"/>
+                  </a:lnTo>
+                  <a:lnTo>
+                    <a:pt x="929524" y="1451951"/>
+                  </a:lnTo>
+                  <a:lnTo>
+                    <a:pt x="1001147" y="1534632"/>
+                  </a:lnTo>
+                  <a:lnTo>
+                    <a:pt x="1072769" y="1613948"/>
+                  </a:lnTo>
+                  <a:lnTo>
+                    <a:pt x="1144392" y="1690037"/>
+                  </a:lnTo>
+                  <a:lnTo>
+                    <a:pt x="1216014" y="1763029"/>
+                  </a:lnTo>
+                  <a:lnTo>
+                    <a:pt x="1287637" y="1833051"/>
+                  </a:lnTo>
+                  <a:lnTo>
+                    <a:pt x="1359259" y="1900224"/>
+                  </a:lnTo>
+                  <a:lnTo>
+                    <a:pt x="1430882" y="1964663"/>
+                  </a:lnTo>
+                  <a:lnTo>
+                    <a:pt x="1502504" y="2026479"/>
+                  </a:lnTo>
+                  <a:lnTo>
+                    <a:pt x="1574127" y="2085781"/>
+                  </a:lnTo>
+                  <a:lnTo>
+                    <a:pt x="1645749" y="2142669"/>
+                  </a:lnTo>
+                  <a:lnTo>
+                    <a:pt x="1717372" y="2197242"/>
+                  </a:lnTo>
+                  <a:lnTo>
+                    <a:pt x="1788994" y="2249594"/>
+                  </a:lnTo>
+                  <a:lnTo>
+                    <a:pt x="1860617" y="2299816"/>
+                  </a:lnTo>
+                  <a:lnTo>
+                    <a:pt x="1932240" y="2347994"/>
+                  </a:lnTo>
+                  <a:lnTo>
+                    <a:pt x="2003862" y="2394212"/>
+                  </a:lnTo>
+                  <a:lnTo>
+                    <a:pt x="2075485" y="2438549"/>
+                  </a:lnTo>
+                  <a:lnTo>
+                    <a:pt x="2147107" y="2481082"/>
+                  </a:lnTo>
+                  <a:lnTo>
+                    <a:pt x="2218730" y="2521884"/>
+                  </a:lnTo>
+                  <a:lnTo>
+                    <a:pt x="2290352" y="2561025"/>
+                  </a:lnTo>
+                  <a:lnTo>
+                    <a:pt x="2361975" y="2598574"/>
+                  </a:lnTo>
+                  <a:lnTo>
+                    <a:pt x="2433597" y="2634595"/>
+                  </a:lnTo>
+                  <a:lnTo>
+                    <a:pt x="2505220" y="2655816"/>
+                  </a:lnTo>
+                  <a:lnTo>
+                    <a:pt x="2576842" y="2659326"/>
+                  </a:lnTo>
+                  <a:lnTo>
+                    <a:pt x="2648465" y="2662822"/>
+                  </a:lnTo>
+                  <a:lnTo>
+                    <a:pt x="2720087" y="2666303"/>
+                  </a:lnTo>
+                  <a:lnTo>
+                    <a:pt x="2791710" y="2669769"/>
+                  </a:lnTo>
+                  <a:lnTo>
+                    <a:pt x="2863332" y="2673220"/>
+                  </a:lnTo>
+                  <a:lnTo>
+                    <a:pt x="2934955" y="2676657"/>
+                  </a:lnTo>
+                  <a:lnTo>
+                    <a:pt x="3006577" y="2680079"/>
+                  </a:lnTo>
+                  <a:lnTo>
+                    <a:pt x="3078200" y="2683486"/>
+                  </a:lnTo>
+                  <a:lnTo>
+                    <a:pt x="3149822" y="2686879"/>
+                  </a:lnTo>
+                  <a:lnTo>
+                    <a:pt x="3221445" y="2690258"/>
+                  </a:lnTo>
+                  <a:lnTo>
+                    <a:pt x="3293068" y="2693623"/>
+                  </a:lnTo>
+                  <a:lnTo>
+                    <a:pt x="3364690" y="2696973"/>
+                  </a:lnTo>
+                  <a:lnTo>
+                    <a:pt x="3436313" y="2700309"/>
+                  </a:lnTo>
+                  <a:lnTo>
+                    <a:pt x="3507935" y="2703630"/>
+                  </a:lnTo>
+                  <a:lnTo>
+                    <a:pt x="3579558" y="2706938"/>
+                  </a:lnTo>
+                  <a:lnTo>
+                    <a:pt x="3651180" y="2710232"/>
+                  </a:lnTo>
+                  <a:lnTo>
+                    <a:pt x="3722803" y="2713512"/>
+                  </a:lnTo>
+                  <a:lnTo>
+                    <a:pt x="3794425" y="2716777"/>
+                  </a:lnTo>
+                  <a:lnTo>
+                    <a:pt x="3866048" y="2720029"/>
+                  </a:lnTo>
+                  <a:lnTo>
+                    <a:pt x="3937670" y="2723268"/>
+                  </a:lnTo>
+                  <a:lnTo>
+                    <a:pt x="4009293" y="2726492"/>
+                  </a:lnTo>
+                  <a:lnTo>
+                    <a:pt x="4080915" y="2729703"/>
+                  </a:lnTo>
+                  <a:lnTo>
+                    <a:pt x="4152538" y="2732900"/>
+                  </a:lnTo>
+                  <a:lnTo>
+                    <a:pt x="4224160" y="2736084"/>
+                  </a:lnTo>
+                  <a:lnTo>
+                    <a:pt x="4295783" y="2739254"/>
+                  </a:lnTo>
+                  <a:lnTo>
+                    <a:pt x="4367405" y="2742411"/>
+                  </a:lnTo>
+                  <a:lnTo>
+                    <a:pt x="4439028" y="2745554"/>
+                  </a:lnTo>
+                  <a:lnTo>
+                    <a:pt x="4510650" y="2748684"/>
+                  </a:lnTo>
+                  <a:lnTo>
+                    <a:pt x="4582273" y="2751800"/>
+                  </a:lnTo>
+                  <a:lnTo>
+                    <a:pt x="4653896" y="2754904"/>
+                  </a:lnTo>
+                  <a:lnTo>
+                    <a:pt x="4725518" y="2757994"/>
+                  </a:lnTo>
+                  <a:lnTo>
+                    <a:pt x="4797141" y="2761072"/>
+                  </a:lnTo>
+                  <a:lnTo>
+                    <a:pt x="4868763" y="2764136"/>
+                  </a:lnTo>
+                  <a:lnTo>
+                    <a:pt x="4940386" y="2767187"/>
+                  </a:lnTo>
+                  <a:lnTo>
+                    <a:pt x="5012008" y="2770225"/>
+                  </a:lnTo>
+                  <a:lnTo>
+                    <a:pt x="5083631" y="2773250"/>
+                  </a:lnTo>
+                  <a:lnTo>
+                    <a:pt x="5155253" y="2776263"/>
+                  </a:lnTo>
+                  <a:lnTo>
+                    <a:pt x="5226876" y="2779263"/>
+                  </a:lnTo>
+                  <a:lnTo>
+                    <a:pt x="5298498" y="2782250"/>
+                  </a:lnTo>
+                  <a:lnTo>
+                    <a:pt x="5370121" y="2785224"/>
+                  </a:lnTo>
+                  <a:lnTo>
+                    <a:pt x="5441743" y="2788186"/>
+                  </a:lnTo>
+                  <a:lnTo>
+                    <a:pt x="5513366" y="2791135"/>
+                  </a:lnTo>
+                  <a:lnTo>
+                    <a:pt x="5584988" y="2794072"/>
+                  </a:lnTo>
+                  <a:lnTo>
+                    <a:pt x="5656611" y="2796996"/>
+                  </a:lnTo>
+                  <a:lnTo>
+                    <a:pt x="5728233" y="2799908"/>
+                  </a:lnTo>
+                  <a:lnTo>
+                    <a:pt x="5799856" y="2802807"/>
+                  </a:lnTo>
+                  <a:lnTo>
+                    <a:pt x="5871478" y="2805695"/>
+                  </a:lnTo>
+                  <a:lnTo>
+                    <a:pt x="5943101" y="2808570"/>
+                  </a:lnTo>
+                  <a:lnTo>
+                    <a:pt x="6014724" y="2811432"/>
+                  </a:lnTo>
+                  <a:lnTo>
+                    <a:pt x="6086346" y="2814283"/>
+                  </a:lnTo>
+                  <a:lnTo>
+                    <a:pt x="6157969" y="2817122"/>
+                  </a:lnTo>
+                  <a:lnTo>
+                    <a:pt x="6229591" y="2819948"/>
+                  </a:lnTo>
+                  <a:lnTo>
+                    <a:pt x="6301214" y="2822763"/>
+                  </a:lnTo>
+                  <a:lnTo>
+                    <a:pt x="6372836" y="2825565"/>
                   </a:lnTo>
                 </a:path>
               </a:pathLst>
@@ -4285,309 +4285,309 @@
           </p:nvSpPr>
           <p:spPr>
             <a:xfrm>
-              <a:off x="1172049" y="4553592"/>
-              <a:ext cx="7090630" cy="918061"/>
+              <a:off x="1172049" y="4554865"/>
+              <a:ext cx="7090630" cy="915959"/>
             </a:xfrm>
             <a:custGeom>
               <a:avLst/>
               <a:pathLst>
-                <a:path w="7090630" h="918061">
+                <a:path w="7090630" h="915959">
                   <a:moveTo>
-                    <a:pt x="7090630" y="918061"/>
+                    <a:pt x="7090630" y="915959"/>
                   </a:moveTo>
                   <a:lnTo>
-                    <a:pt x="7019007" y="914414"/>
-                  </a:lnTo>
-                  <a:lnTo>
-                    <a:pt x="6947385" y="910612"/>
-                  </a:lnTo>
-                  <a:lnTo>
-                    <a:pt x="6875762" y="906648"/>
-                  </a:lnTo>
-                  <a:lnTo>
-                    <a:pt x="6804139" y="902515"/>
-                  </a:lnTo>
-                  <a:lnTo>
-                    <a:pt x="6732517" y="898206"/>
-                  </a:lnTo>
-                  <a:lnTo>
-                    <a:pt x="6660894" y="893713"/>
-                  </a:lnTo>
-                  <a:lnTo>
-                    <a:pt x="6589272" y="889029"/>
-                  </a:lnTo>
-                  <a:lnTo>
-                    <a:pt x="6517649" y="884145"/>
-                  </a:lnTo>
-                  <a:lnTo>
-                    <a:pt x="6446027" y="879053"/>
-                  </a:lnTo>
-                  <a:lnTo>
-                    <a:pt x="6374404" y="873745"/>
-                  </a:lnTo>
-                  <a:lnTo>
-                    <a:pt x="6302782" y="868210"/>
-                  </a:lnTo>
-                  <a:lnTo>
-                    <a:pt x="6231159" y="862439"/>
-                  </a:lnTo>
-                  <a:lnTo>
-                    <a:pt x="6159537" y="856423"/>
-                  </a:lnTo>
-                  <a:lnTo>
-                    <a:pt x="6087914" y="850150"/>
-                  </a:lnTo>
-                  <a:lnTo>
-                    <a:pt x="6016292" y="843610"/>
-                  </a:lnTo>
-                  <a:lnTo>
-                    <a:pt x="5944669" y="836791"/>
-                  </a:lnTo>
-                  <a:lnTo>
-                    <a:pt x="5873047" y="829682"/>
-                  </a:lnTo>
-                  <a:lnTo>
-                    <a:pt x="5801424" y="822270"/>
-                  </a:lnTo>
-                  <a:lnTo>
-                    <a:pt x="5729802" y="814542"/>
-                  </a:lnTo>
-                  <a:lnTo>
-                    <a:pt x="5658179" y="806485"/>
-                  </a:lnTo>
-                  <a:lnTo>
-                    <a:pt x="5586557" y="798085"/>
-                  </a:lnTo>
-                  <a:lnTo>
-                    <a:pt x="5514934" y="789326"/>
-                  </a:lnTo>
-                  <a:lnTo>
-                    <a:pt x="5443311" y="780195"/>
-                  </a:lnTo>
-                  <a:lnTo>
-                    <a:pt x="5371689" y="770674"/>
-                  </a:lnTo>
-                  <a:lnTo>
-                    <a:pt x="5300066" y="760748"/>
-                  </a:lnTo>
-                  <a:lnTo>
-                    <a:pt x="5228444" y="750399"/>
-                  </a:lnTo>
-                  <a:lnTo>
-                    <a:pt x="5156821" y="739610"/>
-                  </a:lnTo>
-                  <a:lnTo>
-                    <a:pt x="5085199" y="728360"/>
-                  </a:lnTo>
-                  <a:lnTo>
-                    <a:pt x="5013576" y="716631"/>
-                  </a:lnTo>
-                  <a:lnTo>
-                    <a:pt x="4941954" y="704403"/>
-                  </a:lnTo>
-                  <a:lnTo>
-                    <a:pt x="4870331" y="691653"/>
-                  </a:lnTo>
-                  <a:lnTo>
-                    <a:pt x="4798709" y="678360"/>
-                  </a:lnTo>
-                  <a:lnTo>
-                    <a:pt x="4727086" y="664501"/>
-                  </a:lnTo>
-                  <a:lnTo>
-                    <a:pt x="4655464" y="650052"/>
-                  </a:lnTo>
-                  <a:lnTo>
-                    <a:pt x="4583841" y="634987"/>
-                  </a:lnTo>
-                  <a:lnTo>
-                    <a:pt x="4512219" y="619280"/>
-                  </a:lnTo>
-                  <a:lnTo>
-                    <a:pt x="4440596" y="602904"/>
-                  </a:lnTo>
-                  <a:lnTo>
-                    <a:pt x="4368974" y="585830"/>
-                  </a:lnTo>
-                  <a:lnTo>
-                    <a:pt x="4297351" y="568028"/>
-                  </a:lnTo>
-                  <a:lnTo>
-                    <a:pt x="4225729" y="549469"/>
-                  </a:lnTo>
-                  <a:lnTo>
-                    <a:pt x="4154106" y="530118"/>
-                  </a:lnTo>
-                  <a:lnTo>
-                    <a:pt x="4082483" y="509944"/>
-                  </a:lnTo>
-                  <a:lnTo>
-                    <a:pt x="4010861" y="488909"/>
-                  </a:lnTo>
-                  <a:lnTo>
-                    <a:pt x="3939238" y="466979"/>
-                  </a:lnTo>
-                  <a:lnTo>
-                    <a:pt x="3867616" y="444114"/>
-                  </a:lnTo>
-                  <a:lnTo>
-                    <a:pt x="3795993" y="420275"/>
-                  </a:lnTo>
-                  <a:lnTo>
-                    <a:pt x="3724371" y="395420"/>
-                  </a:lnTo>
-                  <a:lnTo>
-                    <a:pt x="3652748" y="369507"/>
-                  </a:lnTo>
-                  <a:lnTo>
-                    <a:pt x="3581126" y="342489"/>
-                  </a:lnTo>
-                  <a:lnTo>
-                    <a:pt x="3509503" y="314321"/>
-                  </a:lnTo>
-                  <a:lnTo>
-                    <a:pt x="3437881" y="284952"/>
-                  </a:lnTo>
-                  <a:lnTo>
-                    <a:pt x="3366258" y="254332"/>
-                  </a:lnTo>
-                  <a:lnTo>
-                    <a:pt x="3294636" y="222407"/>
-                  </a:lnTo>
-                  <a:lnTo>
-                    <a:pt x="3223013" y="189123"/>
-                  </a:lnTo>
-                  <a:lnTo>
-                    <a:pt x="3151391" y="172187"/>
-                  </a:lnTo>
-                  <a:lnTo>
-                    <a:pt x="3079768" y="168623"/>
-                  </a:lnTo>
-                  <a:lnTo>
-                    <a:pt x="3008146" y="165044"/>
-                  </a:lnTo>
-                  <a:lnTo>
-                    <a:pt x="2936523" y="161449"/>
-                  </a:lnTo>
-                  <a:lnTo>
-                    <a:pt x="2864901" y="157838"/>
-                  </a:lnTo>
-                  <a:lnTo>
-                    <a:pt x="2793278" y="154213"/>
-                  </a:lnTo>
-                  <a:lnTo>
-                    <a:pt x="2721655" y="150571"/>
-                  </a:lnTo>
-                  <a:lnTo>
-                    <a:pt x="2650033" y="146914"/>
-                  </a:lnTo>
-                  <a:lnTo>
-                    <a:pt x="2578410" y="143242"/>
-                  </a:lnTo>
-                  <a:lnTo>
-                    <a:pt x="2506788" y="139554"/>
-                  </a:lnTo>
-                  <a:lnTo>
-                    <a:pt x="2435165" y="135849"/>
-                  </a:lnTo>
-                  <a:lnTo>
-                    <a:pt x="2363543" y="132129"/>
-                  </a:lnTo>
-                  <a:lnTo>
-                    <a:pt x="2291920" y="128393"/>
-                  </a:lnTo>
-                  <a:lnTo>
-                    <a:pt x="2220298" y="124641"/>
-                  </a:lnTo>
-                  <a:lnTo>
-                    <a:pt x="2148675" y="120873"/>
-                  </a:lnTo>
-                  <a:lnTo>
-                    <a:pt x="2077053" y="117089"/>
-                  </a:lnTo>
-                  <a:lnTo>
-                    <a:pt x="2005430" y="113289"/>
-                  </a:lnTo>
-                  <a:lnTo>
-                    <a:pt x="1933808" y="109472"/>
-                  </a:lnTo>
-                  <a:lnTo>
-                    <a:pt x="1862185" y="105639"/>
-                  </a:lnTo>
-                  <a:lnTo>
-                    <a:pt x="1790563" y="101789"/>
-                  </a:lnTo>
-                  <a:lnTo>
-                    <a:pt x="1718940" y="97923"/>
-                  </a:lnTo>
-                  <a:lnTo>
-                    <a:pt x="1647318" y="94041"/>
-                  </a:lnTo>
-                  <a:lnTo>
-                    <a:pt x="1575695" y="90141"/>
-                  </a:lnTo>
-                  <a:lnTo>
-                    <a:pt x="1504073" y="86225"/>
-                  </a:lnTo>
-                  <a:lnTo>
-                    <a:pt x="1432450" y="82293"/>
-                  </a:lnTo>
-                  <a:lnTo>
-                    <a:pt x="1360827" y="78343"/>
-                  </a:lnTo>
-                  <a:lnTo>
-                    <a:pt x="1289205" y="74377"/>
-                  </a:lnTo>
-                  <a:lnTo>
-                    <a:pt x="1217582" y="70393"/>
-                  </a:lnTo>
-                  <a:lnTo>
-                    <a:pt x="1145960" y="66392"/>
-                  </a:lnTo>
-                  <a:lnTo>
-                    <a:pt x="1074337" y="62375"/>
-                  </a:lnTo>
-                  <a:lnTo>
-                    <a:pt x="1002715" y="58340"/>
-                  </a:lnTo>
-                  <a:lnTo>
-                    <a:pt x="931092" y="54287"/>
-                  </a:lnTo>
-                  <a:lnTo>
-                    <a:pt x="859470" y="50218"/>
-                  </a:lnTo>
-                  <a:lnTo>
-                    <a:pt x="787847" y="46131"/>
-                  </a:lnTo>
-                  <a:lnTo>
-                    <a:pt x="716225" y="42026"/>
-                  </a:lnTo>
-                  <a:lnTo>
-                    <a:pt x="644602" y="37904"/>
-                  </a:lnTo>
-                  <a:lnTo>
-                    <a:pt x="572980" y="33764"/>
-                  </a:lnTo>
-                  <a:lnTo>
-                    <a:pt x="501357" y="29606"/>
-                  </a:lnTo>
-                  <a:lnTo>
-                    <a:pt x="429735" y="25431"/>
-                  </a:lnTo>
-                  <a:lnTo>
-                    <a:pt x="358112" y="21237"/>
-                  </a:lnTo>
-                  <a:lnTo>
-                    <a:pt x="286490" y="17026"/>
-                  </a:lnTo>
-                  <a:lnTo>
-                    <a:pt x="214867" y="12797"/>
-                  </a:lnTo>
-                  <a:lnTo>
-                    <a:pt x="143245" y="8549"/>
-                  </a:lnTo>
-                  <a:lnTo>
-                    <a:pt x="71622" y="4284"/>
+                    <a:pt x="7019007" y="912292"/>
+                  </a:lnTo>
+                  <a:lnTo>
+                    <a:pt x="6947385" y="908471"/>
+                  </a:lnTo>
+                  <a:lnTo>
+                    <a:pt x="6875762" y="904487"/>
+                  </a:lnTo>
+                  <a:lnTo>
+                    <a:pt x="6804139" y="900334"/>
+                  </a:lnTo>
+                  <a:lnTo>
+                    <a:pt x="6732517" y="896005"/>
+                  </a:lnTo>
+                  <a:lnTo>
+                    <a:pt x="6660894" y="891493"/>
+                  </a:lnTo>
+                  <a:lnTo>
+                    <a:pt x="6589272" y="886789"/>
+                  </a:lnTo>
+                  <a:lnTo>
+                    <a:pt x="6517649" y="881885"/>
+                  </a:lnTo>
+                  <a:lnTo>
+                    <a:pt x="6446027" y="876774"/>
+                  </a:lnTo>
+                  <a:lnTo>
+                    <a:pt x="6374404" y="871445"/>
+                  </a:lnTo>
+                  <a:lnTo>
+                    <a:pt x="6302782" y="865891"/>
+                  </a:lnTo>
+                  <a:lnTo>
+                    <a:pt x="6231159" y="860101"/>
+                  </a:lnTo>
+                  <a:lnTo>
+                    <a:pt x="6159537" y="854065"/>
+                  </a:lnTo>
+                  <a:lnTo>
+                    <a:pt x="6087914" y="847774"/>
+                  </a:lnTo>
+                  <a:lnTo>
+                    <a:pt x="6016292" y="841215"/>
+                  </a:lnTo>
+                  <a:lnTo>
+                    <a:pt x="5944669" y="834378"/>
+                  </a:lnTo>
+                  <a:lnTo>
+                    <a:pt x="5873047" y="827252"/>
+                  </a:lnTo>
+                  <a:lnTo>
+                    <a:pt x="5801424" y="819823"/>
+                  </a:lnTo>
+                  <a:lnTo>
+                    <a:pt x="5729802" y="812078"/>
+                  </a:lnTo>
+                  <a:lnTo>
+                    <a:pt x="5658179" y="804006"/>
+                  </a:lnTo>
+                  <a:lnTo>
+                    <a:pt x="5586557" y="795591"/>
+                  </a:lnTo>
+                  <a:lnTo>
+                    <a:pt x="5514934" y="786819"/>
+                  </a:lnTo>
+                  <a:lnTo>
+                    <a:pt x="5443311" y="777674"/>
+                  </a:lnTo>
+                  <a:lnTo>
+                    <a:pt x="5371689" y="768142"/>
+                  </a:lnTo>
+                  <a:lnTo>
+                    <a:pt x="5300066" y="758206"/>
+                  </a:lnTo>
+                  <a:lnTo>
+                    <a:pt x="5228444" y="747848"/>
+                  </a:lnTo>
+                  <a:lnTo>
+                    <a:pt x="5156821" y="737050"/>
+                  </a:lnTo>
+                  <a:lnTo>
+                    <a:pt x="5085199" y="725795"/>
+                  </a:lnTo>
+                  <a:lnTo>
+                    <a:pt x="5013576" y="714062"/>
+                  </a:lnTo>
+                  <a:lnTo>
+                    <a:pt x="4941954" y="701832"/>
+                  </a:lnTo>
+                  <a:lnTo>
+                    <a:pt x="4870331" y="689082"/>
+                  </a:lnTo>
+                  <a:lnTo>
+                    <a:pt x="4798709" y="675792"/>
+                  </a:lnTo>
+                  <a:lnTo>
+                    <a:pt x="4727086" y="661938"/>
+                  </a:lnTo>
+                  <a:lnTo>
+                    <a:pt x="4655464" y="647497"/>
+                  </a:lnTo>
+                  <a:lnTo>
+                    <a:pt x="4583841" y="632442"/>
+                  </a:lnTo>
+                  <a:lnTo>
+                    <a:pt x="4512219" y="616750"/>
+                  </a:lnTo>
+                  <a:lnTo>
+                    <a:pt x="4440596" y="600391"/>
+                  </a:lnTo>
+                  <a:lnTo>
+                    <a:pt x="4368974" y="583339"/>
+                  </a:lnTo>
+                  <a:lnTo>
+                    <a:pt x="4297351" y="565563"/>
+                  </a:lnTo>
+                  <a:lnTo>
+                    <a:pt x="4225729" y="547033"/>
+                  </a:lnTo>
+                  <a:lnTo>
+                    <a:pt x="4154106" y="527717"/>
+                  </a:lnTo>
+                  <a:lnTo>
+                    <a:pt x="4082483" y="507582"/>
+                  </a:lnTo>
+                  <a:lnTo>
+                    <a:pt x="4010861" y="486593"/>
+                  </a:lnTo>
+                  <a:lnTo>
+                    <a:pt x="3939238" y="464713"/>
+                  </a:lnTo>
+                  <a:lnTo>
+                    <a:pt x="3867616" y="441905"/>
+                  </a:lnTo>
+                  <a:lnTo>
+                    <a:pt x="3795993" y="418130"/>
+                  </a:lnTo>
+                  <a:lnTo>
+                    <a:pt x="3724371" y="393346"/>
+                  </a:lnTo>
+                  <a:lnTo>
+                    <a:pt x="3652748" y="367511"/>
+                  </a:lnTo>
+                  <a:lnTo>
+                    <a:pt x="3581126" y="340580"/>
+                  </a:lnTo>
+                  <a:lnTo>
+                    <a:pt x="3509503" y="312506"/>
+                  </a:lnTo>
+                  <a:lnTo>
+                    <a:pt x="3437881" y="283242"/>
+                  </a:lnTo>
+                  <a:lnTo>
+                    <a:pt x="3366258" y="252736"/>
+                  </a:lnTo>
+                  <a:lnTo>
+                    <a:pt x="3294636" y="220936"/>
+                  </a:lnTo>
+                  <a:lnTo>
+                    <a:pt x="3223013" y="187787"/>
+                  </a:lnTo>
+                  <a:lnTo>
+                    <a:pt x="3151391" y="170928"/>
+                  </a:lnTo>
+                  <a:lnTo>
+                    <a:pt x="3079768" y="167388"/>
+                  </a:lnTo>
+                  <a:lnTo>
+                    <a:pt x="3008146" y="163832"/>
+                  </a:lnTo>
+                  <a:lnTo>
+                    <a:pt x="2936523" y="160262"/>
+                  </a:lnTo>
+                  <a:lnTo>
+                    <a:pt x="2864901" y="156676"/>
+                  </a:lnTo>
+                  <a:lnTo>
+                    <a:pt x="2793278" y="153075"/>
+                  </a:lnTo>
+                  <a:lnTo>
+                    <a:pt x="2721655" y="149458"/>
+                  </a:lnTo>
+                  <a:lnTo>
+                    <a:pt x="2650033" y="145826"/>
+                  </a:lnTo>
+                  <a:lnTo>
+                    <a:pt x="2578410" y="142179"/>
+                  </a:lnTo>
+                  <a:lnTo>
+                    <a:pt x="2506788" y="138516"/>
+                  </a:lnTo>
+                  <a:lnTo>
+                    <a:pt x="2435165" y="134838"/>
+                  </a:lnTo>
+                  <a:lnTo>
+                    <a:pt x="2363543" y="131144"/>
+                  </a:lnTo>
+                  <a:lnTo>
+                    <a:pt x="2291920" y="127434"/>
+                  </a:lnTo>
+                  <a:lnTo>
+                    <a:pt x="2220298" y="123708"/>
+                  </a:lnTo>
+                  <a:lnTo>
+                    <a:pt x="2148675" y="119967"/>
+                  </a:lnTo>
+                  <a:lnTo>
+                    <a:pt x="2077053" y="116209"/>
+                  </a:lnTo>
+                  <a:lnTo>
+                    <a:pt x="2005430" y="112436"/>
+                  </a:lnTo>
+                  <a:lnTo>
+                    <a:pt x="1933808" y="108646"/>
+                  </a:lnTo>
+                  <a:lnTo>
+                    <a:pt x="1862185" y="104841"/>
+                  </a:lnTo>
+                  <a:lnTo>
+                    <a:pt x="1790563" y="101019"/>
+                  </a:lnTo>
+                  <a:lnTo>
+                    <a:pt x="1718940" y="97181"/>
+                  </a:lnTo>
+                  <a:lnTo>
+                    <a:pt x="1647318" y="93326"/>
+                  </a:lnTo>
+                  <a:lnTo>
+                    <a:pt x="1575695" y="89455"/>
+                  </a:lnTo>
+                  <a:lnTo>
+                    <a:pt x="1504073" y="85568"/>
+                  </a:lnTo>
+                  <a:lnTo>
+                    <a:pt x="1432450" y="81664"/>
+                  </a:lnTo>
+                  <a:lnTo>
+                    <a:pt x="1360827" y="77744"/>
+                  </a:lnTo>
+                  <a:lnTo>
+                    <a:pt x="1289205" y="73807"/>
+                  </a:lnTo>
+                  <a:lnTo>
+                    <a:pt x="1217582" y="69853"/>
+                  </a:lnTo>
+                  <a:lnTo>
+                    <a:pt x="1145960" y="65882"/>
+                  </a:lnTo>
+                  <a:lnTo>
+                    <a:pt x="1074337" y="61894"/>
+                  </a:lnTo>
+                  <a:lnTo>
+                    <a:pt x="1002715" y="57889"/>
+                  </a:lnTo>
+                  <a:lnTo>
+                    <a:pt x="931092" y="53868"/>
+                  </a:lnTo>
+                  <a:lnTo>
+                    <a:pt x="859470" y="49829"/>
+                  </a:lnTo>
+                  <a:lnTo>
+                    <a:pt x="787847" y="45773"/>
+                  </a:lnTo>
+                  <a:lnTo>
+                    <a:pt x="716225" y="41699"/>
+                  </a:lnTo>
+                  <a:lnTo>
+                    <a:pt x="644602" y="37609"/>
+                  </a:lnTo>
+                  <a:lnTo>
+                    <a:pt x="572980" y="33500"/>
+                  </a:lnTo>
+                  <a:lnTo>
+                    <a:pt x="501357" y="29375"/>
+                  </a:lnTo>
+                  <a:lnTo>
+                    <a:pt x="429735" y="25232"/>
+                  </a:lnTo>
+                  <a:lnTo>
+                    <a:pt x="358112" y="21071"/>
+                  </a:lnTo>
+                  <a:lnTo>
+                    <a:pt x="286490" y="16892"/>
+                  </a:lnTo>
+                  <a:lnTo>
+                    <a:pt x="214867" y="12696"/>
+                  </a:lnTo>
+                  <a:lnTo>
+                    <a:pt x="143245" y="8482"/>
+                  </a:lnTo>
+                  <a:lnTo>
+                    <a:pt x="71622" y="4250"/>
                   </a:lnTo>
                   <a:lnTo>
                     <a:pt x="0" y="0"/>
@@ -4610,312 +4610,312 @@
           </p:nvSpPr>
           <p:spPr>
             <a:xfrm>
-              <a:off x="1172049" y="3245520"/>
-              <a:ext cx="7090630" cy="2074557"/>
+              <a:off x="1172049" y="3256088"/>
+              <a:ext cx="7090630" cy="2062658"/>
             </a:xfrm>
             <a:custGeom>
               <a:avLst/>
               <a:pathLst>
-                <a:path w="7090630" h="2074557">
+                <a:path w="7090630" h="2062658">
                   <a:moveTo>
                     <a:pt x="0" y="0"/>
                   </a:moveTo>
                   <a:lnTo>
-                    <a:pt x="71622" y="52562"/>
-                  </a:lnTo>
-                  <a:lnTo>
-                    <a:pt x="143245" y="103929"/>
-                  </a:lnTo>
-                  <a:lnTo>
-                    <a:pt x="214867" y="154128"/>
-                  </a:lnTo>
-                  <a:lnTo>
-                    <a:pt x="286490" y="203186"/>
-                  </a:lnTo>
-                  <a:lnTo>
-                    <a:pt x="358112" y="251128"/>
-                  </a:lnTo>
-                  <a:lnTo>
-                    <a:pt x="429735" y="297980"/>
-                  </a:lnTo>
-                  <a:lnTo>
-                    <a:pt x="501357" y="343767"/>
-                  </a:lnTo>
-                  <a:lnTo>
-                    <a:pt x="572980" y="388513"/>
-                  </a:lnTo>
-                  <a:lnTo>
-                    <a:pt x="644602" y="432242"/>
-                  </a:lnTo>
-                  <a:lnTo>
-                    <a:pt x="716225" y="474976"/>
-                  </a:lnTo>
-                  <a:lnTo>
-                    <a:pt x="787847" y="516738"/>
-                  </a:lnTo>
-                  <a:lnTo>
-                    <a:pt x="859470" y="557551"/>
-                  </a:lnTo>
-                  <a:lnTo>
-                    <a:pt x="931092" y="597436"/>
-                  </a:lnTo>
-                  <a:lnTo>
-                    <a:pt x="1002715" y="636415"/>
-                  </a:lnTo>
-                  <a:lnTo>
-                    <a:pt x="1074337" y="674506"/>
-                  </a:lnTo>
-                  <a:lnTo>
-                    <a:pt x="1145960" y="711732"/>
-                  </a:lnTo>
-                  <a:lnTo>
-                    <a:pt x="1217582" y="748112"/>
-                  </a:lnTo>
-                  <a:lnTo>
-                    <a:pt x="1289205" y="783664"/>
-                  </a:lnTo>
-                  <a:lnTo>
-                    <a:pt x="1360827" y="818408"/>
-                  </a:lnTo>
-                  <a:lnTo>
-                    <a:pt x="1432450" y="852362"/>
-                  </a:lnTo>
-                  <a:lnTo>
-                    <a:pt x="1504073" y="885544"/>
-                  </a:lnTo>
-                  <a:lnTo>
-                    <a:pt x="1575695" y="917971"/>
-                  </a:lnTo>
-                  <a:lnTo>
-                    <a:pt x="1647318" y="949661"/>
-                  </a:lnTo>
-                  <a:lnTo>
-                    <a:pt x="1718940" y="980631"/>
-                  </a:lnTo>
-                  <a:lnTo>
-                    <a:pt x="1790563" y="1010896"/>
-                  </a:lnTo>
-                  <a:lnTo>
-                    <a:pt x="1862185" y="1040473"/>
-                  </a:lnTo>
-                  <a:lnTo>
-                    <a:pt x="1933808" y="1069378"/>
-                  </a:lnTo>
-                  <a:lnTo>
-                    <a:pt x="2005430" y="1097626"/>
-                  </a:lnTo>
-                  <a:lnTo>
-                    <a:pt x="2077053" y="1125231"/>
-                  </a:lnTo>
-                  <a:lnTo>
-                    <a:pt x="2148675" y="1152209"/>
-                  </a:lnTo>
-                  <a:lnTo>
-                    <a:pt x="2220298" y="1178573"/>
-                  </a:lnTo>
-                  <a:lnTo>
-                    <a:pt x="2291920" y="1204338"/>
-                  </a:lnTo>
-                  <a:lnTo>
-                    <a:pt x="2363543" y="1229516"/>
-                  </a:lnTo>
-                  <a:lnTo>
-                    <a:pt x="2435165" y="1254123"/>
-                  </a:lnTo>
-                  <a:lnTo>
-                    <a:pt x="2506788" y="1278170"/>
-                  </a:lnTo>
-                  <a:lnTo>
-                    <a:pt x="2578410" y="1301670"/>
-                  </a:lnTo>
-                  <a:lnTo>
-                    <a:pt x="2650033" y="1324636"/>
-                  </a:lnTo>
-                  <a:lnTo>
-                    <a:pt x="2721655" y="1347080"/>
-                  </a:lnTo>
-                  <a:lnTo>
-                    <a:pt x="2793278" y="1369013"/>
-                  </a:lnTo>
-                  <a:lnTo>
-                    <a:pt x="2864901" y="1390448"/>
-                  </a:lnTo>
-                  <a:lnTo>
-                    <a:pt x="2936523" y="1411395"/>
-                  </a:lnTo>
-                  <a:lnTo>
-                    <a:pt x="3008146" y="1431866"/>
-                  </a:lnTo>
-                  <a:lnTo>
-                    <a:pt x="3079768" y="1451872"/>
-                  </a:lnTo>
-                  <a:lnTo>
-                    <a:pt x="3151391" y="1471422"/>
-                  </a:lnTo>
-                  <a:lnTo>
-                    <a:pt x="3223013" y="1490529"/>
-                  </a:lnTo>
-                  <a:lnTo>
-                    <a:pt x="3294636" y="1509200"/>
-                  </a:lnTo>
-                  <a:lnTo>
-                    <a:pt x="3366258" y="1527448"/>
-                  </a:lnTo>
-                  <a:lnTo>
-                    <a:pt x="3437881" y="1545280"/>
-                  </a:lnTo>
-                  <a:lnTo>
-                    <a:pt x="3509503" y="1562707"/>
-                  </a:lnTo>
-                  <a:lnTo>
-                    <a:pt x="3581126" y="1579738"/>
-                  </a:lnTo>
-                  <a:lnTo>
-                    <a:pt x="3652748" y="1596381"/>
-                  </a:lnTo>
-                  <a:lnTo>
-                    <a:pt x="3724371" y="1612646"/>
-                  </a:lnTo>
-                  <a:lnTo>
-                    <a:pt x="3795993" y="1628541"/>
-                  </a:lnTo>
-                  <a:lnTo>
-                    <a:pt x="3867616" y="1644075"/>
-                  </a:lnTo>
-                  <a:lnTo>
-                    <a:pt x="3939238" y="1659255"/>
-                  </a:lnTo>
-                  <a:lnTo>
-                    <a:pt x="4010861" y="1674091"/>
-                  </a:lnTo>
-                  <a:lnTo>
-                    <a:pt x="4082483" y="1688589"/>
-                  </a:lnTo>
-                  <a:lnTo>
-                    <a:pt x="4154106" y="1702757"/>
-                  </a:lnTo>
-                  <a:lnTo>
-                    <a:pt x="4225729" y="1716604"/>
-                  </a:lnTo>
-                  <a:lnTo>
-                    <a:pt x="4297351" y="1730135"/>
-                  </a:lnTo>
-                  <a:lnTo>
-                    <a:pt x="4368974" y="1743359"/>
-                  </a:lnTo>
-                  <a:lnTo>
-                    <a:pt x="4440596" y="1756282"/>
-                  </a:lnTo>
-                  <a:lnTo>
-                    <a:pt x="4512219" y="1768911"/>
-                  </a:lnTo>
-                  <a:lnTo>
-                    <a:pt x="4583841" y="1781253"/>
-                  </a:lnTo>
-                  <a:lnTo>
-                    <a:pt x="4655464" y="1793315"/>
-                  </a:lnTo>
-                  <a:lnTo>
-                    <a:pt x="4727086" y="1805102"/>
-                  </a:lnTo>
-                  <a:lnTo>
-                    <a:pt x="4798709" y="1816621"/>
-                  </a:lnTo>
-                  <a:lnTo>
-                    <a:pt x="4870331" y="1827879"/>
-                  </a:lnTo>
-                  <a:lnTo>
-                    <a:pt x="4941954" y="1838880"/>
-                  </a:lnTo>
-                  <a:lnTo>
-                    <a:pt x="5013576" y="1849631"/>
-                  </a:lnTo>
-                  <a:lnTo>
-                    <a:pt x="5085199" y="1860138"/>
-                  </a:lnTo>
-                  <a:lnTo>
-                    <a:pt x="5156821" y="1870406"/>
-                  </a:lnTo>
-                  <a:lnTo>
-                    <a:pt x="5228444" y="1880441"/>
-                  </a:lnTo>
-                  <a:lnTo>
-                    <a:pt x="5300066" y="1890247"/>
-                  </a:lnTo>
-                  <a:lnTo>
-                    <a:pt x="5371689" y="1899830"/>
-                  </a:lnTo>
-                  <a:lnTo>
-                    <a:pt x="5443311" y="1909195"/>
-                  </a:lnTo>
-                  <a:lnTo>
-                    <a:pt x="5514934" y="1918348"/>
-                  </a:lnTo>
-                  <a:lnTo>
-                    <a:pt x="5586557" y="1927292"/>
-                  </a:lnTo>
-                  <a:lnTo>
-                    <a:pt x="5658179" y="1936033"/>
-                  </a:lnTo>
-                  <a:lnTo>
-                    <a:pt x="5729802" y="1944576"/>
-                  </a:lnTo>
-                  <a:lnTo>
-                    <a:pt x="5801424" y="1952924"/>
-                  </a:lnTo>
-                  <a:lnTo>
-                    <a:pt x="5873047" y="1961082"/>
-                  </a:lnTo>
-                  <a:lnTo>
-                    <a:pt x="5944669" y="1969055"/>
-                  </a:lnTo>
-                  <a:lnTo>
-                    <a:pt x="6016292" y="1976846"/>
-                  </a:lnTo>
-                  <a:lnTo>
-                    <a:pt x="6087914" y="1984460"/>
-                  </a:lnTo>
-                  <a:lnTo>
-                    <a:pt x="6159537" y="1991901"/>
-                  </a:lnTo>
-                  <a:lnTo>
-                    <a:pt x="6231159" y="1999173"/>
-                  </a:lnTo>
-                  <a:lnTo>
-                    <a:pt x="6302782" y="2006280"/>
-                  </a:lnTo>
-                  <a:lnTo>
-                    <a:pt x="6374404" y="2013225"/>
-                  </a:lnTo>
-                  <a:lnTo>
-                    <a:pt x="6446027" y="2020012"/>
-                  </a:lnTo>
-                  <a:lnTo>
-                    <a:pt x="6517649" y="2026645"/>
-                  </a:lnTo>
-                  <a:lnTo>
-                    <a:pt x="6589272" y="2033127"/>
-                  </a:lnTo>
-                  <a:lnTo>
-                    <a:pt x="6660894" y="2039462"/>
-                  </a:lnTo>
-                  <a:lnTo>
-                    <a:pt x="6732517" y="2045652"/>
-                  </a:lnTo>
-                  <a:lnTo>
-                    <a:pt x="6804139" y="2051702"/>
-                  </a:lnTo>
-                  <a:lnTo>
-                    <a:pt x="6875762" y="2057614"/>
-                  </a:lnTo>
-                  <a:lnTo>
-                    <a:pt x="6947385" y="2063392"/>
-                  </a:lnTo>
-                  <a:lnTo>
-                    <a:pt x="7019007" y="2069039"/>
-                  </a:lnTo>
-                  <a:lnTo>
-                    <a:pt x="7090630" y="2074557"/>
+                    <a:pt x="71622" y="52090"/>
+                  </a:lnTo>
+                  <a:lnTo>
+                    <a:pt x="143245" y="103002"/>
+                  </a:lnTo>
+                  <a:lnTo>
+                    <a:pt x="214867" y="152761"/>
+                  </a:lnTo>
+                  <a:lnTo>
+                    <a:pt x="286490" y="201393"/>
+                  </a:lnTo>
+                  <a:lnTo>
+                    <a:pt x="358112" y="248925"/>
+                  </a:lnTo>
+                  <a:lnTo>
+                    <a:pt x="429735" y="295381"/>
+                  </a:lnTo>
+                  <a:lnTo>
+                    <a:pt x="501357" y="340785"/>
+                  </a:lnTo>
+                  <a:lnTo>
+                    <a:pt x="572980" y="385162"/>
+                  </a:lnTo>
+                  <a:lnTo>
+                    <a:pt x="644602" y="428534"/>
+                  </a:lnTo>
+                  <a:lnTo>
+                    <a:pt x="716225" y="470924"/>
+                  </a:lnTo>
+                  <a:lnTo>
+                    <a:pt x="787847" y="512354"/>
+                  </a:lnTo>
+                  <a:lnTo>
+                    <a:pt x="859470" y="552847"/>
+                  </a:lnTo>
+                  <a:lnTo>
+                    <a:pt x="931092" y="592423"/>
+                  </a:lnTo>
+                  <a:lnTo>
+                    <a:pt x="1002715" y="631103"/>
+                  </a:lnTo>
+                  <a:lnTo>
+                    <a:pt x="1074337" y="668908"/>
+                  </a:lnTo>
+                  <a:lnTo>
+                    <a:pt x="1145960" y="705857"/>
+                  </a:lnTo>
+                  <a:lnTo>
+                    <a:pt x="1217582" y="741969"/>
+                  </a:lnTo>
+                  <a:lnTo>
+                    <a:pt x="1289205" y="777264"/>
+                  </a:lnTo>
+                  <a:lnTo>
+                    <a:pt x="1360827" y="811760"/>
+                  </a:lnTo>
+                  <a:lnTo>
+                    <a:pt x="1432450" y="845475"/>
+                  </a:lnTo>
+                  <a:lnTo>
+                    <a:pt x="1504073" y="878427"/>
+                  </a:lnTo>
+                  <a:lnTo>
+                    <a:pt x="1575695" y="910633"/>
+                  </a:lnTo>
+                  <a:lnTo>
+                    <a:pt x="1647318" y="942110"/>
+                  </a:lnTo>
+                  <a:lnTo>
+                    <a:pt x="1718940" y="972874"/>
+                  </a:lnTo>
+                  <a:lnTo>
+                    <a:pt x="1790563" y="1002942"/>
+                  </a:lnTo>
+                  <a:lnTo>
+                    <a:pt x="1862185" y="1032330"/>
+                  </a:lnTo>
+                  <a:lnTo>
+                    <a:pt x="1933808" y="1061052"/>
+                  </a:lnTo>
+                  <a:lnTo>
+                    <a:pt x="2005430" y="1089124"/>
+                  </a:lnTo>
+                  <a:lnTo>
+                    <a:pt x="2077053" y="1116560"/>
+                  </a:lnTo>
+                  <a:lnTo>
+                    <a:pt x="2148675" y="1143376"/>
+                  </a:lnTo>
+                  <a:lnTo>
+                    <a:pt x="2220298" y="1169584"/>
+                  </a:lnTo>
+                  <a:lnTo>
+                    <a:pt x="2291920" y="1195199"/>
+                  </a:lnTo>
+                  <a:lnTo>
+                    <a:pt x="2363543" y="1220235"/>
+                  </a:lnTo>
+                  <a:lnTo>
+                    <a:pt x="2435165" y="1244703"/>
+                  </a:lnTo>
+                  <a:lnTo>
+                    <a:pt x="2506788" y="1268618"/>
+                  </a:lnTo>
+                  <a:lnTo>
+                    <a:pt x="2578410" y="1291991"/>
+                  </a:lnTo>
+                  <a:lnTo>
+                    <a:pt x="2650033" y="1314836"/>
+                  </a:lnTo>
+                  <a:lnTo>
+                    <a:pt x="2721655" y="1337163"/>
+                  </a:lnTo>
+                  <a:lnTo>
+                    <a:pt x="2793278" y="1358984"/>
+                  </a:lnTo>
+                  <a:lnTo>
+                    <a:pt x="2864901" y="1380312"/>
+                  </a:lnTo>
+                  <a:lnTo>
+                    <a:pt x="2936523" y="1401157"/>
+                  </a:lnTo>
+                  <a:lnTo>
+                    <a:pt x="3008146" y="1421530"/>
+                  </a:lnTo>
+                  <a:lnTo>
+                    <a:pt x="3079768" y="1441442"/>
+                  </a:lnTo>
+                  <a:lnTo>
+                    <a:pt x="3151391" y="1460903"/>
+                  </a:lnTo>
+                  <a:lnTo>
+                    <a:pt x="3223013" y="1479924"/>
+                  </a:lnTo>
+                  <a:lnTo>
+                    <a:pt x="3294636" y="1498514"/>
+                  </a:lnTo>
+                  <a:lnTo>
+                    <a:pt x="3366258" y="1516683"/>
+                  </a:lnTo>
+                  <a:lnTo>
+                    <a:pt x="3437881" y="1534441"/>
+                  </a:lnTo>
+                  <a:lnTo>
+                    <a:pt x="3509503" y="1551797"/>
+                  </a:lnTo>
+                  <a:lnTo>
+                    <a:pt x="3581126" y="1568761"/>
+                  </a:lnTo>
+                  <a:lnTo>
+                    <a:pt x="3652748" y="1585340"/>
+                  </a:lnTo>
+                  <a:lnTo>
+                    <a:pt x="3724371" y="1601543"/>
+                  </a:lnTo>
+                  <a:lnTo>
+                    <a:pt x="3795993" y="1617380"/>
+                  </a:lnTo>
+                  <a:lnTo>
+                    <a:pt x="3867616" y="1632859"/>
+                  </a:lnTo>
+                  <a:lnTo>
+                    <a:pt x="3939238" y="1647987"/>
+                  </a:lnTo>
+                  <a:lnTo>
+                    <a:pt x="4010861" y="1662773"/>
+                  </a:lnTo>
+                  <a:lnTo>
+                    <a:pt x="4082483" y="1677224"/>
+                  </a:lnTo>
+                  <a:lnTo>
+                    <a:pt x="4154106" y="1691348"/>
+                  </a:lnTo>
+                  <a:lnTo>
+                    <a:pt x="4225729" y="1705152"/>
+                  </a:lnTo>
+                  <a:lnTo>
+                    <a:pt x="4297351" y="1718644"/>
+                  </a:lnTo>
+                  <a:lnTo>
+                    <a:pt x="4368974" y="1731830"/>
+                  </a:lnTo>
+                  <a:lnTo>
+                    <a:pt x="4440596" y="1744718"/>
+                  </a:lnTo>
+                  <a:lnTo>
+                    <a:pt x="4512219" y="1757314"/>
+                  </a:lnTo>
+                  <a:lnTo>
+                    <a:pt x="4583841" y="1769625"/>
+                  </a:lnTo>
+                  <a:lnTo>
+                    <a:pt x="4655464" y="1781657"/>
+                  </a:lnTo>
+                  <a:lnTo>
+                    <a:pt x="4727086" y="1793417"/>
+                  </a:lnTo>
+                  <a:lnTo>
+                    <a:pt x="4798709" y="1804910"/>
+                  </a:lnTo>
+                  <a:lnTo>
+                    <a:pt x="4870331" y="1816144"/>
+                  </a:lnTo>
+                  <a:lnTo>
+                    <a:pt x="4941954" y="1827123"/>
+                  </a:lnTo>
+                  <a:lnTo>
+                    <a:pt x="5013576" y="1837854"/>
+                  </a:lnTo>
+                  <a:lnTo>
+                    <a:pt x="5085199" y="1848341"/>
+                  </a:lnTo>
+                  <a:lnTo>
+                    <a:pt x="5156821" y="1858592"/>
+                  </a:lnTo>
+                  <a:lnTo>
+                    <a:pt x="5228444" y="1868610"/>
+                  </a:lnTo>
+                  <a:lnTo>
+                    <a:pt x="5300066" y="1878401"/>
+                  </a:lnTo>
+                  <a:lnTo>
+                    <a:pt x="5371689" y="1887971"/>
+                  </a:lnTo>
+                  <a:lnTo>
+                    <a:pt x="5443311" y="1897325"/>
+                  </a:lnTo>
+                  <a:lnTo>
+                    <a:pt x="5514934" y="1906466"/>
+                  </a:lnTo>
+                  <a:lnTo>
+                    <a:pt x="5586557" y="1915401"/>
+                  </a:lnTo>
+                  <a:lnTo>
+                    <a:pt x="5658179" y="1924133"/>
+                  </a:lnTo>
+                  <a:lnTo>
+                    <a:pt x="5729802" y="1932668"/>
+                  </a:lnTo>
+                  <a:lnTo>
+                    <a:pt x="5801424" y="1941009"/>
+                  </a:lnTo>
+                  <a:lnTo>
+                    <a:pt x="5873047" y="1949162"/>
+                  </a:lnTo>
+                  <a:lnTo>
+                    <a:pt x="5944669" y="1957130"/>
+                  </a:lnTo>
+                  <a:lnTo>
+                    <a:pt x="6016292" y="1964918"/>
+                  </a:lnTo>
+                  <a:lnTo>
+                    <a:pt x="6087914" y="1972529"/>
+                  </a:lnTo>
+                  <a:lnTo>
+                    <a:pt x="6159537" y="1979968"/>
+                  </a:lnTo>
+                  <a:lnTo>
+                    <a:pt x="6231159" y="1987239"/>
+                  </a:lnTo>
+                  <a:lnTo>
+                    <a:pt x="6302782" y="1994345"/>
+                  </a:lnTo>
+                  <a:lnTo>
+                    <a:pt x="6374404" y="2001290"/>
+                  </a:lnTo>
+                  <a:lnTo>
+                    <a:pt x="6446027" y="2008078"/>
+                  </a:lnTo>
+                  <a:lnTo>
+                    <a:pt x="6517649" y="2014713"/>
+                  </a:lnTo>
+                  <a:lnTo>
+                    <a:pt x="6589272" y="2021197"/>
+                  </a:lnTo>
+                  <a:lnTo>
+                    <a:pt x="6660894" y="2027535"/>
+                  </a:lnTo>
+                  <a:lnTo>
+                    <a:pt x="6732517" y="2033729"/>
+                  </a:lnTo>
+                  <a:lnTo>
+                    <a:pt x="6804139" y="2039782"/>
+                  </a:lnTo>
+                  <a:lnTo>
+                    <a:pt x="6875762" y="2045699"/>
+                  </a:lnTo>
+                  <a:lnTo>
+                    <a:pt x="6947385" y="2051482"/>
+                  </a:lnTo>
+                  <a:lnTo>
+                    <a:pt x="7019007" y="2057134"/>
+                  </a:lnTo>
+                  <a:lnTo>
+                    <a:pt x="7090630" y="2062658"/>
                   </a:lnTo>
                 </a:path>
               </a:pathLst>
@@ -5839,7 +5839,7 @@
                   <a:latin typeface="Helvetica"/>
                   <a:cs typeface="Helvetica"/>
                 </a:rPr>
-                <a:t>subHR per 10 % decline: 1.34 (1.06-1.69), p_Bonf = 0.096 (n = 6)  |  per IQR decline (Δ = 24.3 %): 2.02 (1.14-3.59)  |  IQR: [-22.7, 1.6] %</a:t>
+                <a:t>subHR per 10 % decline: 1.33 (1.06-1.69), p_Bonf = 0.097 (n = 6)  |  per IQR decline (Δ = 24.3 %): 2.02 (1.14-3.57)  |  IQR: [-22.7, 1.6] %</a:t>
               </a:r>
             </a:p>
           </p:txBody>
